--- a/docs/pptx/entire/ritu-entire-linsubhr-disc-aki2.pptx
+++ b/docs/pptx/entire/ritu-entire-linsubhr-disc-aki2.pptx
@@ -3045,612 +3045,612 @@
           </p:nvSpPr>
           <p:spPr>
             <a:xfrm>
-              <a:off x="1172049" y="2259082"/>
-              <a:ext cx="7090630" cy="2875163"/>
+              <a:off x="1172049" y="2236150"/>
+              <a:ext cx="7090630" cy="2899523"/>
             </a:xfrm>
             <a:custGeom>
               <a:avLst/>
               <a:pathLst>
-                <a:path w="7090630" h="2875163">
+                <a:path w="7090630" h="2899523">
                   <a:moveTo>
                     <a:pt x="0" y="0"/>
                   </a:moveTo>
                   <a:lnTo>
-                    <a:pt x="71622" y="67715"/>
-                  </a:lnTo>
-                  <a:lnTo>
-                    <a:pt x="143245" y="134040"/>
-                  </a:lnTo>
-                  <a:lnTo>
-                    <a:pt x="214867" y="199003"/>
-                  </a:lnTo>
-                  <a:lnTo>
-                    <a:pt x="286490" y="262632"/>
-                  </a:lnTo>
-                  <a:lnTo>
-                    <a:pt x="358112" y="324955"/>
-                  </a:lnTo>
-                  <a:lnTo>
-                    <a:pt x="429735" y="385999"/>
-                  </a:lnTo>
-                  <a:lnTo>
-                    <a:pt x="501357" y="445789"/>
-                  </a:lnTo>
-                  <a:lnTo>
-                    <a:pt x="572980" y="504352"/>
-                  </a:lnTo>
-                  <a:lnTo>
-                    <a:pt x="644602" y="561712"/>
-                  </a:lnTo>
-                  <a:lnTo>
-                    <a:pt x="716225" y="617895"/>
-                  </a:lnTo>
-                  <a:lnTo>
-                    <a:pt x="787847" y="672924"/>
-                  </a:lnTo>
-                  <a:lnTo>
-                    <a:pt x="859470" y="726823"/>
-                  </a:lnTo>
-                  <a:lnTo>
-                    <a:pt x="931092" y="779616"/>
-                  </a:lnTo>
-                  <a:lnTo>
-                    <a:pt x="1002715" y="831325"/>
-                  </a:lnTo>
-                  <a:lnTo>
-                    <a:pt x="1074337" y="881972"/>
-                  </a:lnTo>
-                  <a:lnTo>
-                    <a:pt x="1145960" y="931579"/>
-                  </a:lnTo>
-                  <a:lnTo>
-                    <a:pt x="1217582" y="980168"/>
-                  </a:lnTo>
-                  <a:lnTo>
-                    <a:pt x="1289205" y="1027759"/>
-                  </a:lnTo>
-                  <a:lnTo>
-                    <a:pt x="1360827" y="1074373"/>
-                  </a:lnTo>
-                  <a:lnTo>
-                    <a:pt x="1432450" y="1120030"/>
-                  </a:lnTo>
-                  <a:lnTo>
-                    <a:pt x="1504073" y="1164750"/>
-                  </a:lnTo>
-                  <a:lnTo>
-                    <a:pt x="1575695" y="1208551"/>
-                  </a:lnTo>
-                  <a:lnTo>
-                    <a:pt x="1647318" y="1251454"/>
-                  </a:lnTo>
-                  <a:lnTo>
-                    <a:pt x="1718940" y="1293475"/>
-                  </a:lnTo>
-                  <a:lnTo>
-                    <a:pt x="1790563" y="1334634"/>
-                  </a:lnTo>
-                  <a:lnTo>
-                    <a:pt x="1862185" y="1374947"/>
-                  </a:lnTo>
-                  <a:lnTo>
-                    <a:pt x="1933808" y="1414433"/>
-                  </a:lnTo>
-                  <a:lnTo>
-                    <a:pt x="2005430" y="1453109"/>
-                  </a:lnTo>
-                  <a:lnTo>
-                    <a:pt x="2077053" y="1490990"/>
-                  </a:lnTo>
-                  <a:lnTo>
-                    <a:pt x="2148675" y="1528093"/>
-                  </a:lnTo>
-                  <a:lnTo>
-                    <a:pt x="2220298" y="1564435"/>
-                  </a:lnTo>
-                  <a:lnTo>
-                    <a:pt x="2291920" y="1600030"/>
-                  </a:lnTo>
-                  <a:lnTo>
-                    <a:pt x="2363543" y="1634895"/>
-                  </a:lnTo>
-                  <a:lnTo>
-                    <a:pt x="2435165" y="1669044"/>
-                  </a:lnTo>
-                  <a:lnTo>
-                    <a:pt x="2506788" y="1702492"/>
-                  </a:lnTo>
-                  <a:lnTo>
-                    <a:pt x="2578410" y="1735253"/>
-                  </a:lnTo>
-                  <a:lnTo>
-                    <a:pt x="2650033" y="1767341"/>
-                  </a:lnTo>
-                  <a:lnTo>
-                    <a:pt x="2721655" y="1798771"/>
-                  </a:lnTo>
-                  <a:lnTo>
-                    <a:pt x="2793278" y="1829555"/>
-                  </a:lnTo>
-                  <a:lnTo>
-                    <a:pt x="2864901" y="1859708"/>
-                  </a:lnTo>
-                  <a:lnTo>
-                    <a:pt x="2936523" y="1889241"/>
-                  </a:lnTo>
-                  <a:lnTo>
-                    <a:pt x="3008146" y="1918168"/>
-                  </a:lnTo>
-                  <a:lnTo>
-                    <a:pt x="3079768" y="1946501"/>
-                  </a:lnTo>
-                  <a:lnTo>
-                    <a:pt x="3151391" y="1974252"/>
-                  </a:lnTo>
-                  <a:lnTo>
-                    <a:pt x="3223013" y="2001434"/>
-                  </a:lnTo>
-                  <a:lnTo>
-                    <a:pt x="3294636" y="2028057"/>
-                  </a:lnTo>
-                  <a:lnTo>
-                    <a:pt x="3366258" y="2054134"/>
-                  </a:lnTo>
-                  <a:lnTo>
-                    <a:pt x="3437881" y="2079675"/>
-                  </a:lnTo>
-                  <a:lnTo>
-                    <a:pt x="3509503" y="2104692"/>
-                  </a:lnTo>
-                  <a:lnTo>
-                    <a:pt x="3581126" y="2129196"/>
-                  </a:lnTo>
-                  <a:lnTo>
-                    <a:pt x="3652748" y="2153196"/>
-                  </a:lnTo>
-                  <a:lnTo>
-                    <a:pt x="3724371" y="2176704"/>
-                  </a:lnTo>
-                  <a:lnTo>
-                    <a:pt x="3795993" y="2199729"/>
-                  </a:lnTo>
-                  <a:lnTo>
-                    <a:pt x="3867616" y="2222281"/>
-                  </a:lnTo>
-                  <a:lnTo>
-                    <a:pt x="3939238" y="2244370"/>
-                  </a:lnTo>
-                  <a:lnTo>
-                    <a:pt x="4010861" y="2266006"/>
-                  </a:lnTo>
-                  <a:lnTo>
-                    <a:pt x="4082483" y="2287197"/>
-                  </a:lnTo>
-                  <a:lnTo>
-                    <a:pt x="4154106" y="2307954"/>
-                  </a:lnTo>
-                  <a:lnTo>
-                    <a:pt x="4225729" y="2328284"/>
-                  </a:lnTo>
-                  <a:lnTo>
-                    <a:pt x="4297351" y="2348197"/>
-                  </a:lnTo>
-                  <a:lnTo>
-                    <a:pt x="4368974" y="2367701"/>
-                  </a:lnTo>
-                  <a:lnTo>
-                    <a:pt x="4440596" y="2386804"/>
-                  </a:lnTo>
-                  <a:lnTo>
-                    <a:pt x="4512219" y="2405515"/>
-                  </a:lnTo>
-                  <a:lnTo>
-                    <a:pt x="4583841" y="2423843"/>
-                  </a:lnTo>
-                  <a:lnTo>
-                    <a:pt x="4655464" y="2441794"/>
-                  </a:lnTo>
-                  <a:lnTo>
-                    <a:pt x="4727086" y="2459376"/>
-                  </a:lnTo>
-                  <a:lnTo>
-                    <a:pt x="4798709" y="2470625"/>
-                  </a:lnTo>
-                  <a:lnTo>
-                    <a:pt x="4870331" y="2474779"/>
-                  </a:lnTo>
-                  <a:lnTo>
-                    <a:pt x="4941954" y="2478913"/>
-                  </a:lnTo>
-                  <a:lnTo>
-                    <a:pt x="5013576" y="2483026"/>
-                  </a:lnTo>
-                  <a:lnTo>
-                    <a:pt x="5085199" y="2487118"/>
-                  </a:lnTo>
-                  <a:lnTo>
-                    <a:pt x="5156821" y="2491189"/>
-                  </a:lnTo>
-                  <a:lnTo>
-                    <a:pt x="5228444" y="2495240"/>
-                  </a:lnTo>
-                  <a:lnTo>
-                    <a:pt x="5300066" y="2499271"/>
-                  </a:lnTo>
-                  <a:lnTo>
-                    <a:pt x="5371689" y="2503281"/>
-                  </a:lnTo>
-                  <a:lnTo>
-                    <a:pt x="5443311" y="2507272"/>
-                  </a:lnTo>
-                  <a:lnTo>
-                    <a:pt x="5514934" y="2511242"/>
-                  </a:lnTo>
-                  <a:lnTo>
-                    <a:pt x="5586557" y="2515192"/>
-                  </a:lnTo>
-                  <a:lnTo>
-                    <a:pt x="5658179" y="2519123"/>
-                  </a:lnTo>
-                  <a:lnTo>
-                    <a:pt x="5729802" y="2523034"/>
-                  </a:lnTo>
-                  <a:lnTo>
-                    <a:pt x="5801424" y="2526925"/>
-                  </a:lnTo>
-                  <a:lnTo>
-                    <a:pt x="5873047" y="2530797"/>
-                  </a:lnTo>
-                  <a:lnTo>
-                    <a:pt x="5944669" y="2534649"/>
-                  </a:lnTo>
-                  <a:lnTo>
-                    <a:pt x="6016292" y="2538482"/>
-                  </a:lnTo>
-                  <a:lnTo>
-                    <a:pt x="6087914" y="2542295"/>
-                  </a:lnTo>
-                  <a:lnTo>
-                    <a:pt x="6159537" y="2546090"/>
-                  </a:lnTo>
-                  <a:lnTo>
-                    <a:pt x="6231159" y="2549865"/>
-                  </a:lnTo>
-                  <a:lnTo>
-                    <a:pt x="6302782" y="2553622"/>
-                  </a:lnTo>
-                  <a:lnTo>
-                    <a:pt x="6374404" y="2557359"/>
-                  </a:lnTo>
-                  <a:lnTo>
-                    <a:pt x="6446027" y="2561078"/>
-                  </a:lnTo>
-                  <a:lnTo>
-                    <a:pt x="6517649" y="2564778"/>
-                  </a:lnTo>
-                  <a:lnTo>
-                    <a:pt x="6589272" y="2568460"/>
-                  </a:lnTo>
-                  <a:lnTo>
-                    <a:pt x="6660894" y="2572123"/>
-                  </a:lnTo>
-                  <a:lnTo>
-                    <a:pt x="6732517" y="2575768"/>
-                  </a:lnTo>
-                  <a:lnTo>
-                    <a:pt x="6804139" y="2579394"/>
-                  </a:lnTo>
-                  <a:lnTo>
-                    <a:pt x="6875762" y="2583003"/>
-                  </a:lnTo>
-                  <a:lnTo>
-                    <a:pt x="6947385" y="2586593"/>
-                  </a:lnTo>
-                  <a:lnTo>
-                    <a:pt x="7019007" y="2590165"/>
-                  </a:lnTo>
-                  <a:lnTo>
-                    <a:pt x="7090630" y="2593719"/>
-                  </a:lnTo>
-                  <a:lnTo>
-                    <a:pt x="7090630" y="2875163"/>
-                  </a:lnTo>
-                  <a:lnTo>
-                    <a:pt x="7019007" y="2866296"/>
-                  </a:lnTo>
-                  <a:lnTo>
-                    <a:pt x="6947385" y="2857244"/>
-                  </a:lnTo>
-                  <a:lnTo>
-                    <a:pt x="6875762" y="2848001"/>
-                  </a:lnTo>
-                  <a:lnTo>
-                    <a:pt x="6804139" y="2838565"/>
-                  </a:lnTo>
-                  <a:lnTo>
-                    <a:pt x="6732517" y="2828931"/>
-                  </a:lnTo>
-                  <a:lnTo>
-                    <a:pt x="6660894" y="2819095"/>
-                  </a:lnTo>
-                  <a:lnTo>
-                    <a:pt x="6589272" y="2809053"/>
-                  </a:lnTo>
-                  <a:lnTo>
-                    <a:pt x="6517649" y="2798800"/>
-                  </a:lnTo>
-                  <a:lnTo>
-                    <a:pt x="6446027" y="2788333"/>
-                  </a:lnTo>
-                  <a:lnTo>
-                    <a:pt x="6374404" y="2777646"/>
-                  </a:lnTo>
-                  <a:lnTo>
-                    <a:pt x="6302782" y="2766735"/>
-                  </a:lnTo>
-                  <a:lnTo>
-                    <a:pt x="6231159" y="2755596"/>
-                  </a:lnTo>
-                  <a:lnTo>
-                    <a:pt x="6159537" y="2744222"/>
-                  </a:lnTo>
-                  <a:lnTo>
-                    <a:pt x="6087914" y="2732611"/>
-                  </a:lnTo>
-                  <a:lnTo>
-                    <a:pt x="6016292" y="2720756"/>
-                  </a:lnTo>
-                  <a:lnTo>
-                    <a:pt x="5944669" y="2708653"/>
-                  </a:lnTo>
-                  <a:lnTo>
-                    <a:pt x="5873047" y="2696295"/>
-                  </a:lnTo>
-                  <a:lnTo>
-                    <a:pt x="5801424" y="2683679"/>
-                  </a:lnTo>
-                  <a:lnTo>
-                    <a:pt x="5729802" y="2670799"/>
-                  </a:lnTo>
-                  <a:lnTo>
-                    <a:pt x="5658179" y="2657648"/>
-                  </a:lnTo>
-                  <a:lnTo>
-                    <a:pt x="5586557" y="2644222"/>
-                  </a:lnTo>
-                  <a:lnTo>
-                    <a:pt x="5514934" y="2630514"/>
-                  </a:lnTo>
-                  <a:lnTo>
-                    <a:pt x="5443311" y="2616519"/>
-                  </a:lnTo>
-                  <a:lnTo>
-                    <a:pt x="5371689" y="2602231"/>
-                  </a:lnTo>
-                  <a:lnTo>
-                    <a:pt x="5300066" y="2587643"/>
-                  </a:lnTo>
-                  <a:lnTo>
-                    <a:pt x="5228444" y="2572749"/>
-                  </a:lnTo>
-                  <a:lnTo>
-                    <a:pt x="5156821" y="2557543"/>
-                  </a:lnTo>
-                  <a:lnTo>
-                    <a:pt x="5085199" y="2542019"/>
-                  </a:lnTo>
-                  <a:lnTo>
-                    <a:pt x="5013576" y="2526169"/>
-                  </a:lnTo>
-                  <a:lnTo>
-                    <a:pt x="4941954" y="2509986"/>
-                  </a:lnTo>
-                  <a:lnTo>
-                    <a:pt x="4870331" y="2493465"/>
-                  </a:lnTo>
-                  <a:lnTo>
-                    <a:pt x="4798709" y="2476597"/>
-                  </a:lnTo>
-                  <a:lnTo>
-                    <a:pt x="4727086" y="2466450"/>
-                  </a:lnTo>
-                  <a:lnTo>
-                    <a:pt x="4655464" y="2462254"/>
-                  </a:lnTo>
-                  <a:lnTo>
-                    <a:pt x="4583841" y="2458036"/>
-                  </a:lnTo>
-                  <a:lnTo>
-                    <a:pt x="4512219" y="2453797"/>
-                  </a:lnTo>
-                  <a:lnTo>
-                    <a:pt x="4440596" y="2449537"/>
-                  </a:lnTo>
-                  <a:lnTo>
-                    <a:pt x="4368974" y="2445256"/>
-                  </a:lnTo>
-                  <a:lnTo>
-                    <a:pt x="4297351" y="2440952"/>
-                  </a:lnTo>
-                  <a:lnTo>
-                    <a:pt x="4225729" y="2436627"/>
-                  </a:lnTo>
-                  <a:lnTo>
-                    <a:pt x="4154106" y="2432281"/>
-                  </a:lnTo>
-                  <a:lnTo>
-                    <a:pt x="4082483" y="2427912"/>
-                  </a:lnTo>
-                  <a:lnTo>
-                    <a:pt x="4010861" y="2423521"/>
-                  </a:lnTo>
-                  <a:lnTo>
-                    <a:pt x="3939238" y="2419108"/>
-                  </a:lnTo>
-                  <a:lnTo>
-                    <a:pt x="3867616" y="2414673"/>
-                  </a:lnTo>
-                  <a:lnTo>
-                    <a:pt x="3795993" y="2410216"/>
-                  </a:lnTo>
-                  <a:lnTo>
-                    <a:pt x="3724371" y="2405736"/>
-                  </a:lnTo>
-                  <a:lnTo>
-                    <a:pt x="3652748" y="2401233"/>
-                  </a:lnTo>
-                  <a:lnTo>
-                    <a:pt x="3581126" y="2396708"/>
-                  </a:lnTo>
-                  <a:lnTo>
-                    <a:pt x="3509503" y="2392160"/>
-                  </a:lnTo>
-                  <a:lnTo>
-                    <a:pt x="3437881" y="2387588"/>
-                  </a:lnTo>
-                  <a:lnTo>
-                    <a:pt x="3366258" y="2382994"/>
-                  </a:lnTo>
-                  <a:lnTo>
-                    <a:pt x="3294636" y="2378377"/>
-                  </a:lnTo>
-                  <a:lnTo>
-                    <a:pt x="3223013" y="2373736"/>
-                  </a:lnTo>
-                  <a:lnTo>
-                    <a:pt x="3151391" y="2369072"/>
-                  </a:lnTo>
-                  <a:lnTo>
-                    <a:pt x="3079768" y="2364385"/>
-                  </a:lnTo>
-                  <a:lnTo>
-                    <a:pt x="3008146" y="2359673"/>
-                  </a:lnTo>
-                  <a:lnTo>
-                    <a:pt x="2936523" y="2354938"/>
-                  </a:lnTo>
-                  <a:lnTo>
-                    <a:pt x="2864901" y="2350179"/>
-                  </a:lnTo>
-                  <a:lnTo>
-                    <a:pt x="2793278" y="2345396"/>
-                  </a:lnTo>
-                  <a:lnTo>
-                    <a:pt x="2721655" y="2340589"/>
-                  </a:lnTo>
-                  <a:lnTo>
-                    <a:pt x="2650033" y="2335758"/>
-                  </a:lnTo>
-                  <a:lnTo>
-                    <a:pt x="2578410" y="2330902"/>
-                  </a:lnTo>
-                  <a:lnTo>
-                    <a:pt x="2506788" y="2326022"/>
-                  </a:lnTo>
-                  <a:lnTo>
-                    <a:pt x="2435165" y="2321117"/>
-                  </a:lnTo>
-                  <a:lnTo>
-                    <a:pt x="2363543" y="2316188"/>
-                  </a:lnTo>
-                  <a:lnTo>
-                    <a:pt x="2291920" y="2311233"/>
-                  </a:lnTo>
-                  <a:lnTo>
-                    <a:pt x="2220298" y="2306254"/>
-                  </a:lnTo>
-                  <a:lnTo>
-                    <a:pt x="2148675" y="2301249"/>
-                  </a:lnTo>
-                  <a:lnTo>
-                    <a:pt x="2077053" y="2296220"/>
-                  </a:lnTo>
-                  <a:lnTo>
-                    <a:pt x="2005430" y="2291164"/>
-                  </a:lnTo>
-                  <a:lnTo>
-                    <a:pt x="1933808" y="2286084"/>
-                  </a:lnTo>
-                  <a:lnTo>
-                    <a:pt x="1862185" y="2280977"/>
-                  </a:lnTo>
-                  <a:lnTo>
-                    <a:pt x="1790563" y="2275845"/>
-                  </a:lnTo>
-                  <a:lnTo>
-                    <a:pt x="1718940" y="2270687"/>
-                  </a:lnTo>
-                  <a:lnTo>
-                    <a:pt x="1647318" y="2265503"/>
-                  </a:lnTo>
-                  <a:lnTo>
-                    <a:pt x="1575695" y="2260293"/>
-                  </a:lnTo>
-                  <a:lnTo>
-                    <a:pt x="1504073" y="2255057"/>
-                  </a:lnTo>
-                  <a:lnTo>
-                    <a:pt x="1432450" y="2249794"/>
-                  </a:lnTo>
-                  <a:lnTo>
-                    <a:pt x="1360827" y="2244505"/>
-                  </a:lnTo>
-                  <a:lnTo>
-                    <a:pt x="1289205" y="2239188"/>
-                  </a:lnTo>
-                  <a:lnTo>
-                    <a:pt x="1217582" y="2233846"/>
-                  </a:lnTo>
-                  <a:lnTo>
-                    <a:pt x="1145960" y="2228476"/>
-                  </a:lnTo>
-                  <a:lnTo>
-                    <a:pt x="1074337" y="2223079"/>
-                  </a:lnTo>
-                  <a:lnTo>
-                    <a:pt x="1002715" y="2217655"/>
-                  </a:lnTo>
-                  <a:lnTo>
-                    <a:pt x="931092" y="2212203"/>
-                  </a:lnTo>
-                  <a:lnTo>
-                    <a:pt x="859470" y="2206724"/>
-                  </a:lnTo>
-                  <a:lnTo>
-                    <a:pt x="787847" y="2201217"/>
-                  </a:lnTo>
-                  <a:lnTo>
-                    <a:pt x="716225" y="2195683"/>
-                  </a:lnTo>
-                  <a:lnTo>
-                    <a:pt x="644602" y="2190120"/>
-                  </a:lnTo>
-                  <a:lnTo>
-                    <a:pt x="572980" y="2184530"/>
-                  </a:lnTo>
-                  <a:lnTo>
-                    <a:pt x="501357" y="2178911"/>
-                  </a:lnTo>
-                  <a:lnTo>
-                    <a:pt x="429735" y="2173264"/>
-                  </a:lnTo>
-                  <a:lnTo>
-                    <a:pt x="358112" y="2167589"/>
-                  </a:lnTo>
-                  <a:lnTo>
-                    <a:pt x="286490" y="2161884"/>
-                  </a:lnTo>
-                  <a:lnTo>
-                    <a:pt x="214867" y="2156151"/>
-                  </a:lnTo>
-                  <a:lnTo>
-                    <a:pt x="143245" y="2150390"/>
-                  </a:lnTo>
-                  <a:lnTo>
-                    <a:pt x="71622" y="2144599"/>
-                  </a:lnTo>
-                  <a:lnTo>
-                    <a:pt x="0" y="2138778"/>
+                    <a:pt x="71622" y="68524"/>
+                  </a:lnTo>
+                  <a:lnTo>
+                    <a:pt x="143245" y="135635"/>
+                  </a:lnTo>
+                  <a:lnTo>
+                    <a:pt x="214867" y="201361"/>
+                  </a:lnTo>
+                  <a:lnTo>
+                    <a:pt x="286490" y="265731"/>
+                  </a:lnTo>
+                  <a:lnTo>
+                    <a:pt x="358112" y="328773"/>
+                  </a:lnTo>
+                  <a:lnTo>
+                    <a:pt x="429735" y="390514"/>
+                  </a:lnTo>
+                  <a:lnTo>
+                    <a:pt x="501357" y="450982"/>
+                  </a:lnTo>
+                  <a:lnTo>
+                    <a:pt x="572980" y="510201"/>
+                  </a:lnTo>
+                  <a:lnTo>
+                    <a:pt x="644602" y="568199"/>
+                  </a:lnTo>
+                  <a:lnTo>
+                    <a:pt x="716225" y="625000"/>
+                  </a:lnTo>
+                  <a:lnTo>
+                    <a:pt x="787847" y="680629"/>
+                  </a:lnTo>
+                  <a:lnTo>
+                    <a:pt x="859470" y="735110"/>
+                  </a:lnTo>
+                  <a:lnTo>
+                    <a:pt x="931092" y="788467"/>
+                  </a:lnTo>
+                  <a:lnTo>
+                    <a:pt x="1002715" y="840724"/>
+                  </a:lnTo>
+                  <a:lnTo>
+                    <a:pt x="1074337" y="891902"/>
+                  </a:lnTo>
+                  <a:lnTo>
+                    <a:pt x="1145960" y="942024"/>
+                  </a:lnTo>
+                  <a:lnTo>
+                    <a:pt x="1217582" y="991111"/>
+                  </a:lnTo>
+                  <a:lnTo>
+                    <a:pt x="1289205" y="1039186"/>
+                  </a:lnTo>
+                  <a:lnTo>
+                    <a:pt x="1360827" y="1086269"/>
+                  </a:lnTo>
+                  <a:lnTo>
+                    <a:pt x="1432450" y="1132381"/>
+                  </a:lnTo>
+                  <a:lnTo>
+                    <a:pt x="1504073" y="1177541"/>
+                  </a:lnTo>
+                  <a:lnTo>
+                    <a:pt x="1575695" y="1221770"/>
+                  </a:lnTo>
+                  <a:lnTo>
+                    <a:pt x="1647318" y="1265085"/>
+                  </a:lnTo>
+                  <a:lnTo>
+                    <a:pt x="1718940" y="1307507"/>
+                  </a:lnTo>
+                  <a:lnTo>
+                    <a:pt x="1790563" y="1349054"/>
+                  </a:lnTo>
+                  <a:lnTo>
+                    <a:pt x="1862185" y="1389744"/>
+                  </a:lnTo>
+                  <a:lnTo>
+                    <a:pt x="1933808" y="1429594"/>
+                  </a:lnTo>
+                  <a:lnTo>
+                    <a:pt x="2005430" y="1468621"/>
+                  </a:lnTo>
+                  <a:lnTo>
+                    <a:pt x="2077053" y="1506844"/>
+                  </a:lnTo>
+                  <a:lnTo>
+                    <a:pt x="2148675" y="1544278"/>
+                  </a:lnTo>
+                  <a:lnTo>
+                    <a:pt x="2220298" y="1580939"/>
+                  </a:lnTo>
+                  <a:lnTo>
+                    <a:pt x="2291920" y="1616844"/>
+                  </a:lnTo>
+                  <a:lnTo>
+                    <a:pt x="2363543" y="1652008"/>
+                  </a:lnTo>
+                  <a:lnTo>
+                    <a:pt x="2435165" y="1686447"/>
+                  </a:lnTo>
+                  <a:lnTo>
+                    <a:pt x="2506788" y="1720175"/>
+                  </a:lnTo>
+                  <a:lnTo>
+                    <a:pt x="2578410" y="1753207"/>
+                  </a:lnTo>
+                  <a:lnTo>
+                    <a:pt x="2650033" y="1785558"/>
+                  </a:lnTo>
+                  <a:lnTo>
+                    <a:pt x="2721655" y="1817241"/>
+                  </a:lnTo>
+                  <a:lnTo>
+                    <a:pt x="2793278" y="1848270"/>
+                  </a:lnTo>
+                  <a:lnTo>
+                    <a:pt x="2864901" y="1878659"/>
+                  </a:lnTo>
+                  <a:lnTo>
+                    <a:pt x="2936523" y="1908421"/>
+                  </a:lnTo>
+                  <a:lnTo>
+                    <a:pt x="3008146" y="1937569"/>
+                  </a:lnTo>
+                  <a:lnTo>
+                    <a:pt x="3079768" y="1966116"/>
+                  </a:lnTo>
+                  <a:lnTo>
+                    <a:pt x="3151391" y="1994073"/>
+                  </a:lnTo>
+                  <a:lnTo>
+                    <a:pt x="3223013" y="2021454"/>
+                  </a:lnTo>
+                  <a:lnTo>
+                    <a:pt x="3294636" y="2048270"/>
+                  </a:lnTo>
+                  <a:lnTo>
+                    <a:pt x="3366258" y="2074532"/>
+                  </a:lnTo>
+                  <a:lnTo>
+                    <a:pt x="3437881" y="2100253"/>
+                  </a:lnTo>
+                  <a:lnTo>
+                    <a:pt x="3509503" y="2125443"/>
+                  </a:lnTo>
+                  <a:lnTo>
+                    <a:pt x="3581126" y="2150113"/>
+                  </a:lnTo>
+                  <a:lnTo>
+                    <a:pt x="3652748" y="2174274"/>
+                  </a:lnTo>
+                  <a:lnTo>
+                    <a:pt x="3724371" y="2197937"/>
+                  </a:lnTo>
+                  <a:lnTo>
+                    <a:pt x="3795993" y="2221111"/>
+                  </a:lnTo>
+                  <a:lnTo>
+                    <a:pt x="3867616" y="2243808"/>
+                  </a:lnTo>
+                  <a:lnTo>
+                    <a:pt x="3939238" y="2266035"/>
+                  </a:lnTo>
+                  <a:lnTo>
+                    <a:pt x="4010861" y="2287805"/>
+                  </a:lnTo>
+                  <a:lnTo>
+                    <a:pt x="4082483" y="2309125"/>
+                  </a:lnTo>
+                  <a:lnTo>
+                    <a:pt x="4154106" y="2330005"/>
+                  </a:lnTo>
+                  <a:lnTo>
+                    <a:pt x="4225729" y="2350454"/>
+                  </a:lnTo>
+                  <a:lnTo>
+                    <a:pt x="4297351" y="2370482"/>
+                  </a:lnTo>
+                  <a:lnTo>
+                    <a:pt x="4368974" y="2390096"/>
+                  </a:lnTo>
+                  <a:lnTo>
+                    <a:pt x="4440596" y="2409306"/>
+                  </a:lnTo>
+                  <a:lnTo>
+                    <a:pt x="4512219" y="2428119"/>
+                  </a:lnTo>
+                  <a:lnTo>
+                    <a:pt x="4583841" y="2446544"/>
+                  </a:lnTo>
+                  <a:lnTo>
+                    <a:pt x="4655464" y="2464589"/>
+                  </a:lnTo>
+                  <a:lnTo>
+                    <a:pt x="4727086" y="2482261"/>
+                  </a:lnTo>
+                  <a:lnTo>
+                    <a:pt x="4798709" y="2493604"/>
+                  </a:lnTo>
+                  <a:lnTo>
+                    <a:pt x="4870331" y="2497857"/>
+                  </a:lnTo>
+                  <a:lnTo>
+                    <a:pt x="4941954" y="2502088"/>
+                  </a:lnTo>
+                  <a:lnTo>
+                    <a:pt x="5013576" y="2506298"/>
+                  </a:lnTo>
+                  <a:lnTo>
+                    <a:pt x="5085199" y="2510486"/>
+                  </a:lnTo>
+                  <a:lnTo>
+                    <a:pt x="5156821" y="2514652"/>
+                  </a:lnTo>
+                  <a:lnTo>
+                    <a:pt x="5228444" y="2518797"/>
+                  </a:lnTo>
+                  <a:lnTo>
+                    <a:pt x="5300066" y="2522921"/>
+                  </a:lnTo>
+                  <a:lnTo>
+                    <a:pt x="5371689" y="2527024"/>
+                  </a:lnTo>
+                  <a:lnTo>
+                    <a:pt x="5443311" y="2531105"/>
+                  </a:lnTo>
+                  <a:lnTo>
+                    <a:pt x="5514934" y="2535166"/>
+                  </a:lnTo>
+                  <a:lnTo>
+                    <a:pt x="5586557" y="2539205"/>
+                  </a:lnTo>
+                  <a:lnTo>
+                    <a:pt x="5658179" y="2543224"/>
+                  </a:lnTo>
+                  <a:lnTo>
+                    <a:pt x="5729802" y="2547222"/>
+                  </a:lnTo>
+                  <a:lnTo>
+                    <a:pt x="5801424" y="2551200"/>
+                  </a:lnTo>
+                  <a:lnTo>
+                    <a:pt x="5873047" y="2555157"/>
+                  </a:lnTo>
+                  <a:lnTo>
+                    <a:pt x="5944669" y="2559094"/>
+                  </a:lnTo>
+                  <a:lnTo>
+                    <a:pt x="6016292" y="2563011"/>
+                  </a:lnTo>
+                  <a:lnTo>
+                    <a:pt x="6087914" y="2566907"/>
+                  </a:lnTo>
+                  <a:lnTo>
+                    <a:pt x="6159537" y="2570784"/>
+                  </a:lnTo>
+                  <a:lnTo>
+                    <a:pt x="6231159" y="2574640"/>
+                  </a:lnTo>
+                  <a:lnTo>
+                    <a:pt x="6302782" y="2578477"/>
+                  </a:lnTo>
+                  <a:lnTo>
+                    <a:pt x="6374404" y="2582294"/>
+                  </a:lnTo>
+                  <a:lnTo>
+                    <a:pt x="6446027" y="2586091"/>
+                  </a:lnTo>
+                  <a:lnTo>
+                    <a:pt x="6517649" y="2589869"/>
+                  </a:lnTo>
+                  <a:lnTo>
+                    <a:pt x="6589272" y="2593627"/>
+                  </a:lnTo>
+                  <a:lnTo>
+                    <a:pt x="6660894" y="2597367"/>
+                  </a:lnTo>
+                  <a:lnTo>
+                    <a:pt x="6732517" y="2601086"/>
+                  </a:lnTo>
+                  <a:lnTo>
+                    <a:pt x="6804139" y="2604787"/>
+                  </a:lnTo>
+                  <a:lnTo>
+                    <a:pt x="6875762" y="2608469"/>
+                  </a:lnTo>
+                  <a:lnTo>
+                    <a:pt x="6947385" y="2612132"/>
+                  </a:lnTo>
+                  <a:lnTo>
+                    <a:pt x="7019007" y="2615776"/>
+                  </a:lnTo>
+                  <a:lnTo>
+                    <a:pt x="7090630" y="2619401"/>
+                  </a:lnTo>
+                  <a:lnTo>
+                    <a:pt x="7090630" y="2899523"/>
+                  </a:lnTo>
+                  <a:lnTo>
+                    <a:pt x="7019007" y="2890641"/>
+                  </a:lnTo>
+                  <a:lnTo>
+                    <a:pt x="6947385" y="2881572"/>
+                  </a:lnTo>
+                  <a:lnTo>
+                    <a:pt x="6875762" y="2872313"/>
+                  </a:lnTo>
+                  <a:lnTo>
+                    <a:pt x="6804139" y="2862858"/>
+                  </a:lnTo>
+                  <a:lnTo>
+                    <a:pt x="6732517" y="2853203"/>
+                  </a:lnTo>
+                  <a:lnTo>
+                    <a:pt x="6660894" y="2843346"/>
+                  </a:lnTo>
+                  <a:lnTo>
+                    <a:pt x="6589272" y="2833281"/>
+                  </a:lnTo>
+                  <a:lnTo>
+                    <a:pt x="6517649" y="2823003"/>
+                  </a:lnTo>
+                  <a:lnTo>
+                    <a:pt x="6446027" y="2812509"/>
+                  </a:lnTo>
+                  <a:lnTo>
+                    <a:pt x="6374404" y="2801795"/>
+                  </a:lnTo>
+                  <a:lnTo>
+                    <a:pt x="6302782" y="2790854"/>
+                  </a:lnTo>
+                  <a:lnTo>
+                    <a:pt x="6231159" y="2779683"/>
+                  </a:lnTo>
+                  <a:lnTo>
+                    <a:pt x="6159537" y="2768276"/>
+                  </a:lnTo>
+                  <a:lnTo>
+                    <a:pt x="6087914" y="2756630"/>
+                  </a:lnTo>
+                  <a:lnTo>
+                    <a:pt x="6016292" y="2744737"/>
+                  </a:lnTo>
+                  <a:lnTo>
+                    <a:pt x="5944669" y="2732595"/>
+                  </a:lnTo>
+                  <a:lnTo>
+                    <a:pt x="5873047" y="2720196"/>
+                  </a:lnTo>
+                  <a:lnTo>
+                    <a:pt x="5801424" y="2707536"/>
+                  </a:lnTo>
+                  <a:lnTo>
+                    <a:pt x="5729802" y="2694610"/>
+                  </a:lnTo>
+                  <a:lnTo>
+                    <a:pt x="5658179" y="2681411"/>
+                  </a:lnTo>
+                  <a:lnTo>
+                    <a:pt x="5586557" y="2667934"/>
+                  </a:lnTo>
+                  <a:lnTo>
+                    <a:pt x="5514934" y="2654174"/>
+                  </a:lnTo>
+                  <a:lnTo>
+                    <a:pt x="5443311" y="2640123"/>
+                  </a:lnTo>
+                  <a:lnTo>
+                    <a:pt x="5371689" y="2625776"/>
+                  </a:lnTo>
+                  <a:lnTo>
+                    <a:pt x="5300066" y="2611127"/>
+                  </a:lnTo>
+                  <a:lnTo>
+                    <a:pt x="5228444" y="2596170"/>
+                  </a:lnTo>
+                  <a:lnTo>
+                    <a:pt x="5156821" y="2580897"/>
+                  </a:lnTo>
+                  <a:lnTo>
+                    <a:pt x="5085199" y="2565302"/>
+                  </a:lnTo>
+                  <a:lnTo>
+                    <a:pt x="5013576" y="2549379"/>
+                  </a:lnTo>
+                  <a:lnTo>
+                    <a:pt x="4941954" y="2533121"/>
+                  </a:lnTo>
+                  <a:lnTo>
+                    <a:pt x="4870331" y="2516520"/>
+                  </a:lnTo>
+                  <a:lnTo>
+                    <a:pt x="4798709" y="2499569"/>
+                  </a:lnTo>
+                  <a:lnTo>
+                    <a:pt x="4727086" y="2489328"/>
+                  </a:lnTo>
+                  <a:lnTo>
+                    <a:pt x="4655464" y="2485031"/>
+                  </a:lnTo>
+                  <a:lnTo>
+                    <a:pt x="4583841" y="2480712"/>
+                  </a:lnTo>
+                  <a:lnTo>
+                    <a:pt x="4512219" y="2476370"/>
+                  </a:lnTo>
+                  <a:lnTo>
+                    <a:pt x="4440596" y="2472006"/>
+                  </a:lnTo>
+                  <a:lnTo>
+                    <a:pt x="4368974" y="2467619"/>
+                  </a:lnTo>
+                  <a:lnTo>
+                    <a:pt x="4297351" y="2463209"/>
+                  </a:lnTo>
+                  <a:lnTo>
+                    <a:pt x="4225729" y="2458777"/>
+                  </a:lnTo>
+                  <a:lnTo>
+                    <a:pt x="4154106" y="2454322"/>
+                  </a:lnTo>
+                  <a:lnTo>
+                    <a:pt x="4082483" y="2449844"/>
+                  </a:lnTo>
+                  <a:lnTo>
+                    <a:pt x="4010861" y="2445342"/>
+                  </a:lnTo>
+                  <a:lnTo>
+                    <a:pt x="3939238" y="2440818"/>
+                  </a:lnTo>
+                  <a:lnTo>
+                    <a:pt x="3867616" y="2436270"/>
+                  </a:lnTo>
+                  <a:lnTo>
+                    <a:pt x="3795993" y="2431699"/>
+                  </a:lnTo>
+                  <a:lnTo>
+                    <a:pt x="3724371" y="2427103"/>
+                  </a:lnTo>
+                  <a:lnTo>
+                    <a:pt x="3652748" y="2422485"/>
+                  </a:lnTo>
+                  <a:lnTo>
+                    <a:pt x="3581126" y="2417842"/>
+                  </a:lnTo>
+                  <a:lnTo>
+                    <a:pt x="3509503" y="2413175"/>
+                  </a:lnTo>
+                  <a:lnTo>
+                    <a:pt x="3437881" y="2408485"/>
+                  </a:lnTo>
+                  <a:lnTo>
+                    <a:pt x="3366258" y="2403770"/>
+                  </a:lnTo>
+                  <a:lnTo>
+                    <a:pt x="3294636" y="2399030"/>
+                  </a:lnTo>
+                  <a:lnTo>
+                    <a:pt x="3223013" y="2394267"/>
+                  </a:lnTo>
+                  <a:lnTo>
+                    <a:pt x="3151391" y="2389478"/>
+                  </a:lnTo>
+                  <a:lnTo>
+                    <a:pt x="3079768" y="2384665"/>
+                  </a:lnTo>
+                  <a:lnTo>
+                    <a:pt x="3008146" y="2379827"/>
+                  </a:lnTo>
+                  <a:lnTo>
+                    <a:pt x="2936523" y="2374964"/>
+                  </a:lnTo>
+                  <a:lnTo>
+                    <a:pt x="2864901" y="2370076"/>
+                  </a:lnTo>
+                  <a:lnTo>
+                    <a:pt x="2793278" y="2365162"/>
+                  </a:lnTo>
+                  <a:lnTo>
+                    <a:pt x="2721655" y="2360224"/>
+                  </a:lnTo>
+                  <a:lnTo>
+                    <a:pt x="2650033" y="2355259"/>
+                  </a:lnTo>
+                  <a:lnTo>
+                    <a:pt x="2578410" y="2350269"/>
+                  </a:lnTo>
+                  <a:lnTo>
+                    <a:pt x="2506788" y="2345253"/>
+                  </a:lnTo>
+                  <a:lnTo>
+                    <a:pt x="2435165" y="2340212"/>
+                  </a:lnTo>
+                  <a:lnTo>
+                    <a:pt x="2363543" y="2335144"/>
+                  </a:lnTo>
+                  <a:lnTo>
+                    <a:pt x="2291920" y="2330050"/>
+                  </a:lnTo>
+                  <a:lnTo>
+                    <a:pt x="2220298" y="2324930"/>
+                  </a:lnTo>
+                  <a:lnTo>
+                    <a:pt x="2148675" y="2319783"/>
+                  </a:lnTo>
+                  <a:lnTo>
+                    <a:pt x="2077053" y="2314610"/>
+                  </a:lnTo>
+                  <a:lnTo>
+                    <a:pt x="2005430" y="2309410"/>
+                  </a:lnTo>
+                  <a:lnTo>
+                    <a:pt x="1933808" y="2304183"/>
+                  </a:lnTo>
+                  <a:lnTo>
+                    <a:pt x="1862185" y="2298930"/>
+                  </a:lnTo>
+                  <a:lnTo>
+                    <a:pt x="1790563" y="2293649"/>
+                  </a:lnTo>
+                  <a:lnTo>
+                    <a:pt x="1718940" y="2288340"/>
+                  </a:lnTo>
+                  <a:lnTo>
+                    <a:pt x="1647318" y="2283005"/>
+                  </a:lnTo>
+                  <a:lnTo>
+                    <a:pt x="1575695" y="2277641"/>
+                  </a:lnTo>
+                  <a:lnTo>
+                    <a:pt x="1504073" y="2272250"/>
+                  </a:lnTo>
+                  <a:lnTo>
+                    <a:pt x="1432450" y="2266832"/>
+                  </a:lnTo>
+                  <a:lnTo>
+                    <a:pt x="1360827" y="2261385"/>
+                  </a:lnTo>
+                  <a:lnTo>
+                    <a:pt x="1289205" y="2255910"/>
+                  </a:lnTo>
+                  <a:lnTo>
+                    <a:pt x="1217582" y="2250406"/>
+                  </a:lnTo>
+                  <a:lnTo>
+                    <a:pt x="1145960" y="2244875"/>
+                  </a:lnTo>
+                  <a:lnTo>
+                    <a:pt x="1074337" y="2239315"/>
+                  </a:lnTo>
+                  <a:lnTo>
+                    <a:pt x="1002715" y="2233726"/>
+                  </a:lnTo>
+                  <a:lnTo>
+                    <a:pt x="931092" y="2228108"/>
+                  </a:lnTo>
+                  <a:lnTo>
+                    <a:pt x="859470" y="2222461"/>
+                  </a:lnTo>
+                  <a:lnTo>
+                    <a:pt x="787847" y="2216785"/>
+                  </a:lnTo>
+                  <a:lnTo>
+                    <a:pt x="716225" y="2211079"/>
+                  </a:lnTo>
+                  <a:lnTo>
+                    <a:pt x="644602" y="2205345"/>
+                  </a:lnTo>
+                  <a:lnTo>
+                    <a:pt x="572980" y="2199580"/>
+                  </a:lnTo>
+                  <a:lnTo>
+                    <a:pt x="501357" y="2193786"/>
+                  </a:lnTo>
+                  <a:lnTo>
+                    <a:pt x="429735" y="2187962"/>
+                  </a:lnTo>
+                  <a:lnTo>
+                    <a:pt x="358112" y="2182107"/>
+                  </a:lnTo>
+                  <a:lnTo>
+                    <a:pt x="286490" y="2176223"/>
+                  </a:lnTo>
+                  <a:lnTo>
+                    <a:pt x="214867" y="2170308"/>
+                  </a:lnTo>
+                  <a:lnTo>
+                    <a:pt x="143245" y="2164362"/>
+                  </a:lnTo>
+                  <a:lnTo>
+                    <a:pt x="71622" y="2158386"/>
+                  </a:lnTo>
+                  <a:lnTo>
+                    <a:pt x="0" y="2152379"/>
                   </a:lnTo>
                   <a:close/>
                 </a:path>
@@ -3676,312 +3676,312 @@
           </p:nvSpPr>
           <p:spPr>
             <a:xfrm>
-              <a:off x="1172049" y="2259082"/>
-              <a:ext cx="7090630" cy="2593719"/>
+              <a:off x="1172049" y="2236150"/>
+              <a:ext cx="7090630" cy="2619401"/>
             </a:xfrm>
             <a:custGeom>
               <a:avLst/>
               <a:pathLst>
-                <a:path w="7090630" h="2593719">
+                <a:path w="7090630" h="2619401">
                   <a:moveTo>
                     <a:pt x="0" y="0"/>
                   </a:moveTo>
                   <a:lnTo>
-                    <a:pt x="71622" y="67715"/>
-                  </a:lnTo>
-                  <a:lnTo>
-                    <a:pt x="143245" y="134040"/>
-                  </a:lnTo>
-                  <a:lnTo>
-                    <a:pt x="214867" y="199003"/>
-                  </a:lnTo>
-                  <a:lnTo>
-                    <a:pt x="286490" y="262632"/>
-                  </a:lnTo>
-                  <a:lnTo>
-                    <a:pt x="358112" y="324955"/>
-                  </a:lnTo>
-                  <a:lnTo>
-                    <a:pt x="429735" y="385999"/>
-                  </a:lnTo>
-                  <a:lnTo>
-                    <a:pt x="501357" y="445789"/>
-                  </a:lnTo>
-                  <a:lnTo>
-                    <a:pt x="572980" y="504352"/>
-                  </a:lnTo>
-                  <a:lnTo>
-                    <a:pt x="644602" y="561712"/>
-                  </a:lnTo>
-                  <a:lnTo>
-                    <a:pt x="716225" y="617895"/>
-                  </a:lnTo>
-                  <a:lnTo>
-                    <a:pt x="787847" y="672924"/>
-                  </a:lnTo>
-                  <a:lnTo>
-                    <a:pt x="859470" y="726823"/>
-                  </a:lnTo>
-                  <a:lnTo>
-                    <a:pt x="931092" y="779616"/>
-                  </a:lnTo>
-                  <a:lnTo>
-                    <a:pt x="1002715" y="831325"/>
-                  </a:lnTo>
-                  <a:lnTo>
-                    <a:pt x="1074337" y="881972"/>
-                  </a:lnTo>
-                  <a:lnTo>
-                    <a:pt x="1145960" y="931579"/>
-                  </a:lnTo>
-                  <a:lnTo>
-                    <a:pt x="1217582" y="980168"/>
-                  </a:lnTo>
-                  <a:lnTo>
-                    <a:pt x="1289205" y="1027759"/>
-                  </a:lnTo>
-                  <a:lnTo>
-                    <a:pt x="1360827" y="1074373"/>
-                  </a:lnTo>
-                  <a:lnTo>
-                    <a:pt x="1432450" y="1120030"/>
-                  </a:lnTo>
-                  <a:lnTo>
-                    <a:pt x="1504073" y="1164750"/>
-                  </a:lnTo>
-                  <a:lnTo>
-                    <a:pt x="1575695" y="1208551"/>
-                  </a:lnTo>
-                  <a:lnTo>
-                    <a:pt x="1647318" y="1251454"/>
-                  </a:lnTo>
-                  <a:lnTo>
-                    <a:pt x="1718940" y="1293475"/>
-                  </a:lnTo>
-                  <a:lnTo>
-                    <a:pt x="1790563" y="1334634"/>
-                  </a:lnTo>
-                  <a:lnTo>
-                    <a:pt x="1862185" y="1374947"/>
-                  </a:lnTo>
-                  <a:lnTo>
-                    <a:pt x="1933808" y="1414433"/>
-                  </a:lnTo>
-                  <a:lnTo>
-                    <a:pt x="2005430" y="1453109"/>
-                  </a:lnTo>
-                  <a:lnTo>
-                    <a:pt x="2077053" y="1490990"/>
-                  </a:lnTo>
-                  <a:lnTo>
-                    <a:pt x="2148675" y="1528093"/>
-                  </a:lnTo>
-                  <a:lnTo>
-                    <a:pt x="2220298" y="1564435"/>
-                  </a:lnTo>
-                  <a:lnTo>
-                    <a:pt x="2291920" y="1600030"/>
-                  </a:lnTo>
-                  <a:lnTo>
-                    <a:pt x="2363543" y="1634895"/>
-                  </a:lnTo>
-                  <a:lnTo>
-                    <a:pt x="2435165" y="1669044"/>
-                  </a:lnTo>
-                  <a:lnTo>
-                    <a:pt x="2506788" y="1702492"/>
-                  </a:lnTo>
-                  <a:lnTo>
-                    <a:pt x="2578410" y="1735253"/>
-                  </a:lnTo>
-                  <a:lnTo>
-                    <a:pt x="2650033" y="1767341"/>
-                  </a:lnTo>
-                  <a:lnTo>
-                    <a:pt x="2721655" y="1798771"/>
-                  </a:lnTo>
-                  <a:lnTo>
-                    <a:pt x="2793278" y="1829555"/>
-                  </a:lnTo>
-                  <a:lnTo>
-                    <a:pt x="2864901" y="1859708"/>
-                  </a:lnTo>
-                  <a:lnTo>
-                    <a:pt x="2936523" y="1889241"/>
-                  </a:lnTo>
-                  <a:lnTo>
-                    <a:pt x="3008146" y="1918168"/>
-                  </a:lnTo>
-                  <a:lnTo>
-                    <a:pt x="3079768" y="1946501"/>
-                  </a:lnTo>
-                  <a:lnTo>
-                    <a:pt x="3151391" y="1974252"/>
-                  </a:lnTo>
-                  <a:lnTo>
-                    <a:pt x="3223013" y="2001434"/>
-                  </a:lnTo>
-                  <a:lnTo>
-                    <a:pt x="3294636" y="2028057"/>
-                  </a:lnTo>
-                  <a:lnTo>
-                    <a:pt x="3366258" y="2054134"/>
-                  </a:lnTo>
-                  <a:lnTo>
-                    <a:pt x="3437881" y="2079675"/>
-                  </a:lnTo>
-                  <a:lnTo>
-                    <a:pt x="3509503" y="2104692"/>
-                  </a:lnTo>
-                  <a:lnTo>
-                    <a:pt x="3581126" y="2129196"/>
-                  </a:lnTo>
-                  <a:lnTo>
-                    <a:pt x="3652748" y="2153196"/>
-                  </a:lnTo>
-                  <a:lnTo>
-                    <a:pt x="3724371" y="2176704"/>
-                  </a:lnTo>
-                  <a:lnTo>
-                    <a:pt x="3795993" y="2199729"/>
-                  </a:lnTo>
-                  <a:lnTo>
-                    <a:pt x="3867616" y="2222281"/>
-                  </a:lnTo>
-                  <a:lnTo>
-                    <a:pt x="3939238" y="2244370"/>
-                  </a:lnTo>
-                  <a:lnTo>
-                    <a:pt x="4010861" y="2266006"/>
-                  </a:lnTo>
-                  <a:lnTo>
-                    <a:pt x="4082483" y="2287197"/>
-                  </a:lnTo>
-                  <a:lnTo>
-                    <a:pt x="4154106" y="2307954"/>
-                  </a:lnTo>
-                  <a:lnTo>
-                    <a:pt x="4225729" y="2328284"/>
-                  </a:lnTo>
-                  <a:lnTo>
-                    <a:pt x="4297351" y="2348197"/>
-                  </a:lnTo>
-                  <a:lnTo>
-                    <a:pt x="4368974" y="2367701"/>
-                  </a:lnTo>
-                  <a:lnTo>
-                    <a:pt x="4440596" y="2386804"/>
-                  </a:lnTo>
-                  <a:lnTo>
-                    <a:pt x="4512219" y="2405515"/>
-                  </a:lnTo>
-                  <a:lnTo>
-                    <a:pt x="4583841" y="2423843"/>
-                  </a:lnTo>
-                  <a:lnTo>
-                    <a:pt x="4655464" y="2441794"/>
-                  </a:lnTo>
-                  <a:lnTo>
-                    <a:pt x="4727086" y="2459376"/>
-                  </a:lnTo>
-                  <a:lnTo>
-                    <a:pt x="4798709" y="2470625"/>
-                  </a:lnTo>
-                  <a:lnTo>
-                    <a:pt x="4870331" y="2474779"/>
-                  </a:lnTo>
-                  <a:lnTo>
-                    <a:pt x="4941954" y="2478913"/>
-                  </a:lnTo>
-                  <a:lnTo>
-                    <a:pt x="5013576" y="2483026"/>
-                  </a:lnTo>
-                  <a:lnTo>
-                    <a:pt x="5085199" y="2487118"/>
-                  </a:lnTo>
-                  <a:lnTo>
-                    <a:pt x="5156821" y="2491189"/>
-                  </a:lnTo>
-                  <a:lnTo>
-                    <a:pt x="5228444" y="2495240"/>
-                  </a:lnTo>
-                  <a:lnTo>
-                    <a:pt x="5300066" y="2499271"/>
-                  </a:lnTo>
-                  <a:lnTo>
-                    <a:pt x="5371689" y="2503281"/>
-                  </a:lnTo>
-                  <a:lnTo>
-                    <a:pt x="5443311" y="2507272"/>
-                  </a:lnTo>
-                  <a:lnTo>
-                    <a:pt x="5514934" y="2511242"/>
-                  </a:lnTo>
-                  <a:lnTo>
-                    <a:pt x="5586557" y="2515192"/>
-                  </a:lnTo>
-                  <a:lnTo>
-                    <a:pt x="5658179" y="2519123"/>
-                  </a:lnTo>
-                  <a:lnTo>
-                    <a:pt x="5729802" y="2523034"/>
-                  </a:lnTo>
-                  <a:lnTo>
-                    <a:pt x="5801424" y="2526925"/>
-                  </a:lnTo>
-                  <a:lnTo>
-                    <a:pt x="5873047" y="2530797"/>
-                  </a:lnTo>
-                  <a:lnTo>
-                    <a:pt x="5944669" y="2534649"/>
-                  </a:lnTo>
-                  <a:lnTo>
-                    <a:pt x="6016292" y="2538482"/>
-                  </a:lnTo>
-                  <a:lnTo>
-                    <a:pt x="6087914" y="2542295"/>
-                  </a:lnTo>
-                  <a:lnTo>
-                    <a:pt x="6159537" y="2546090"/>
-                  </a:lnTo>
-                  <a:lnTo>
-                    <a:pt x="6231159" y="2549865"/>
-                  </a:lnTo>
-                  <a:lnTo>
-                    <a:pt x="6302782" y="2553622"/>
-                  </a:lnTo>
-                  <a:lnTo>
-                    <a:pt x="6374404" y="2557359"/>
-                  </a:lnTo>
-                  <a:lnTo>
-                    <a:pt x="6446027" y="2561078"/>
-                  </a:lnTo>
-                  <a:lnTo>
-                    <a:pt x="6517649" y="2564778"/>
-                  </a:lnTo>
-                  <a:lnTo>
-                    <a:pt x="6589272" y="2568460"/>
-                  </a:lnTo>
-                  <a:lnTo>
-                    <a:pt x="6660894" y="2572123"/>
-                  </a:lnTo>
-                  <a:lnTo>
-                    <a:pt x="6732517" y="2575768"/>
-                  </a:lnTo>
-                  <a:lnTo>
-                    <a:pt x="6804139" y="2579394"/>
-                  </a:lnTo>
-                  <a:lnTo>
-                    <a:pt x="6875762" y="2583003"/>
-                  </a:lnTo>
-                  <a:lnTo>
-                    <a:pt x="6947385" y="2586593"/>
-                  </a:lnTo>
-                  <a:lnTo>
-                    <a:pt x="7019007" y="2590165"/>
-                  </a:lnTo>
-                  <a:lnTo>
-                    <a:pt x="7090630" y="2593719"/>
+                    <a:pt x="71622" y="68524"/>
+                  </a:lnTo>
+                  <a:lnTo>
+                    <a:pt x="143245" y="135635"/>
+                  </a:lnTo>
+                  <a:lnTo>
+                    <a:pt x="214867" y="201361"/>
+                  </a:lnTo>
+                  <a:lnTo>
+                    <a:pt x="286490" y="265731"/>
+                  </a:lnTo>
+                  <a:lnTo>
+                    <a:pt x="358112" y="328773"/>
+                  </a:lnTo>
+                  <a:lnTo>
+                    <a:pt x="429735" y="390514"/>
+                  </a:lnTo>
+                  <a:lnTo>
+                    <a:pt x="501357" y="450982"/>
+                  </a:lnTo>
+                  <a:lnTo>
+                    <a:pt x="572980" y="510201"/>
+                  </a:lnTo>
+                  <a:lnTo>
+                    <a:pt x="644602" y="568199"/>
+                  </a:lnTo>
+                  <a:lnTo>
+                    <a:pt x="716225" y="625000"/>
+                  </a:lnTo>
+                  <a:lnTo>
+                    <a:pt x="787847" y="680629"/>
+                  </a:lnTo>
+                  <a:lnTo>
+                    <a:pt x="859470" y="735110"/>
+                  </a:lnTo>
+                  <a:lnTo>
+                    <a:pt x="931092" y="788467"/>
+                  </a:lnTo>
+                  <a:lnTo>
+                    <a:pt x="1002715" y="840724"/>
+                  </a:lnTo>
+                  <a:lnTo>
+                    <a:pt x="1074337" y="891902"/>
+                  </a:lnTo>
+                  <a:lnTo>
+                    <a:pt x="1145960" y="942024"/>
+                  </a:lnTo>
+                  <a:lnTo>
+                    <a:pt x="1217582" y="991111"/>
+                  </a:lnTo>
+                  <a:lnTo>
+                    <a:pt x="1289205" y="1039186"/>
+                  </a:lnTo>
+                  <a:lnTo>
+                    <a:pt x="1360827" y="1086269"/>
+                  </a:lnTo>
+                  <a:lnTo>
+                    <a:pt x="1432450" y="1132381"/>
+                  </a:lnTo>
+                  <a:lnTo>
+                    <a:pt x="1504073" y="1177541"/>
+                  </a:lnTo>
+                  <a:lnTo>
+                    <a:pt x="1575695" y="1221770"/>
+                  </a:lnTo>
+                  <a:lnTo>
+                    <a:pt x="1647318" y="1265085"/>
+                  </a:lnTo>
+                  <a:lnTo>
+                    <a:pt x="1718940" y="1307507"/>
+                  </a:lnTo>
+                  <a:lnTo>
+                    <a:pt x="1790563" y="1349054"/>
+                  </a:lnTo>
+                  <a:lnTo>
+                    <a:pt x="1862185" y="1389744"/>
+                  </a:lnTo>
+                  <a:lnTo>
+                    <a:pt x="1933808" y="1429594"/>
+                  </a:lnTo>
+                  <a:lnTo>
+                    <a:pt x="2005430" y="1468621"/>
+                  </a:lnTo>
+                  <a:lnTo>
+                    <a:pt x="2077053" y="1506844"/>
+                  </a:lnTo>
+                  <a:lnTo>
+                    <a:pt x="2148675" y="1544278"/>
+                  </a:lnTo>
+                  <a:lnTo>
+                    <a:pt x="2220298" y="1580939"/>
+                  </a:lnTo>
+                  <a:lnTo>
+                    <a:pt x="2291920" y="1616844"/>
+                  </a:lnTo>
+                  <a:lnTo>
+                    <a:pt x="2363543" y="1652008"/>
+                  </a:lnTo>
+                  <a:lnTo>
+                    <a:pt x="2435165" y="1686447"/>
+                  </a:lnTo>
+                  <a:lnTo>
+                    <a:pt x="2506788" y="1720175"/>
+                  </a:lnTo>
+                  <a:lnTo>
+                    <a:pt x="2578410" y="1753207"/>
+                  </a:lnTo>
+                  <a:lnTo>
+                    <a:pt x="2650033" y="1785558"/>
+                  </a:lnTo>
+                  <a:lnTo>
+                    <a:pt x="2721655" y="1817241"/>
+                  </a:lnTo>
+                  <a:lnTo>
+                    <a:pt x="2793278" y="1848270"/>
+                  </a:lnTo>
+                  <a:lnTo>
+                    <a:pt x="2864901" y="1878659"/>
+                  </a:lnTo>
+                  <a:lnTo>
+                    <a:pt x="2936523" y="1908421"/>
+                  </a:lnTo>
+                  <a:lnTo>
+                    <a:pt x="3008146" y="1937569"/>
+                  </a:lnTo>
+                  <a:lnTo>
+                    <a:pt x="3079768" y="1966116"/>
+                  </a:lnTo>
+                  <a:lnTo>
+                    <a:pt x="3151391" y="1994073"/>
+                  </a:lnTo>
+                  <a:lnTo>
+                    <a:pt x="3223013" y="2021454"/>
+                  </a:lnTo>
+                  <a:lnTo>
+                    <a:pt x="3294636" y="2048270"/>
+                  </a:lnTo>
+                  <a:lnTo>
+                    <a:pt x="3366258" y="2074532"/>
+                  </a:lnTo>
+                  <a:lnTo>
+                    <a:pt x="3437881" y="2100253"/>
+                  </a:lnTo>
+                  <a:lnTo>
+                    <a:pt x="3509503" y="2125443"/>
+                  </a:lnTo>
+                  <a:lnTo>
+                    <a:pt x="3581126" y="2150113"/>
+                  </a:lnTo>
+                  <a:lnTo>
+                    <a:pt x="3652748" y="2174274"/>
+                  </a:lnTo>
+                  <a:lnTo>
+                    <a:pt x="3724371" y="2197937"/>
+                  </a:lnTo>
+                  <a:lnTo>
+                    <a:pt x="3795993" y="2221111"/>
+                  </a:lnTo>
+                  <a:lnTo>
+                    <a:pt x="3867616" y="2243808"/>
+                  </a:lnTo>
+                  <a:lnTo>
+                    <a:pt x="3939238" y="2266035"/>
+                  </a:lnTo>
+                  <a:lnTo>
+                    <a:pt x="4010861" y="2287805"/>
+                  </a:lnTo>
+                  <a:lnTo>
+                    <a:pt x="4082483" y="2309125"/>
+                  </a:lnTo>
+                  <a:lnTo>
+                    <a:pt x="4154106" y="2330005"/>
+                  </a:lnTo>
+                  <a:lnTo>
+                    <a:pt x="4225729" y="2350454"/>
+                  </a:lnTo>
+                  <a:lnTo>
+                    <a:pt x="4297351" y="2370482"/>
+                  </a:lnTo>
+                  <a:lnTo>
+                    <a:pt x="4368974" y="2390096"/>
+                  </a:lnTo>
+                  <a:lnTo>
+                    <a:pt x="4440596" y="2409306"/>
+                  </a:lnTo>
+                  <a:lnTo>
+                    <a:pt x="4512219" y="2428119"/>
+                  </a:lnTo>
+                  <a:lnTo>
+                    <a:pt x="4583841" y="2446544"/>
+                  </a:lnTo>
+                  <a:lnTo>
+                    <a:pt x="4655464" y="2464589"/>
+                  </a:lnTo>
+                  <a:lnTo>
+                    <a:pt x="4727086" y="2482261"/>
+                  </a:lnTo>
+                  <a:lnTo>
+                    <a:pt x="4798709" y="2493604"/>
+                  </a:lnTo>
+                  <a:lnTo>
+                    <a:pt x="4870331" y="2497857"/>
+                  </a:lnTo>
+                  <a:lnTo>
+                    <a:pt x="4941954" y="2502088"/>
+                  </a:lnTo>
+                  <a:lnTo>
+                    <a:pt x="5013576" y="2506298"/>
+                  </a:lnTo>
+                  <a:lnTo>
+                    <a:pt x="5085199" y="2510486"/>
+                  </a:lnTo>
+                  <a:lnTo>
+                    <a:pt x="5156821" y="2514652"/>
+                  </a:lnTo>
+                  <a:lnTo>
+                    <a:pt x="5228444" y="2518797"/>
+                  </a:lnTo>
+                  <a:lnTo>
+                    <a:pt x="5300066" y="2522921"/>
+                  </a:lnTo>
+                  <a:lnTo>
+                    <a:pt x="5371689" y="2527024"/>
+                  </a:lnTo>
+                  <a:lnTo>
+                    <a:pt x="5443311" y="2531105"/>
+                  </a:lnTo>
+                  <a:lnTo>
+                    <a:pt x="5514934" y="2535166"/>
+                  </a:lnTo>
+                  <a:lnTo>
+                    <a:pt x="5586557" y="2539205"/>
+                  </a:lnTo>
+                  <a:lnTo>
+                    <a:pt x="5658179" y="2543224"/>
+                  </a:lnTo>
+                  <a:lnTo>
+                    <a:pt x="5729802" y="2547222"/>
+                  </a:lnTo>
+                  <a:lnTo>
+                    <a:pt x="5801424" y="2551200"/>
+                  </a:lnTo>
+                  <a:lnTo>
+                    <a:pt x="5873047" y="2555157"/>
+                  </a:lnTo>
+                  <a:lnTo>
+                    <a:pt x="5944669" y="2559094"/>
+                  </a:lnTo>
+                  <a:lnTo>
+                    <a:pt x="6016292" y="2563011"/>
+                  </a:lnTo>
+                  <a:lnTo>
+                    <a:pt x="6087914" y="2566907"/>
+                  </a:lnTo>
+                  <a:lnTo>
+                    <a:pt x="6159537" y="2570784"/>
+                  </a:lnTo>
+                  <a:lnTo>
+                    <a:pt x="6231159" y="2574640"/>
+                  </a:lnTo>
+                  <a:lnTo>
+                    <a:pt x="6302782" y="2578477"/>
+                  </a:lnTo>
+                  <a:lnTo>
+                    <a:pt x="6374404" y="2582294"/>
+                  </a:lnTo>
+                  <a:lnTo>
+                    <a:pt x="6446027" y="2586091"/>
+                  </a:lnTo>
+                  <a:lnTo>
+                    <a:pt x="6517649" y="2589869"/>
+                  </a:lnTo>
+                  <a:lnTo>
+                    <a:pt x="6589272" y="2593627"/>
+                  </a:lnTo>
+                  <a:lnTo>
+                    <a:pt x="6660894" y="2597367"/>
+                  </a:lnTo>
+                  <a:lnTo>
+                    <a:pt x="6732517" y="2601086"/>
+                  </a:lnTo>
+                  <a:lnTo>
+                    <a:pt x="6804139" y="2604787"/>
+                  </a:lnTo>
+                  <a:lnTo>
+                    <a:pt x="6875762" y="2608469"/>
+                  </a:lnTo>
+                  <a:lnTo>
+                    <a:pt x="6947385" y="2612132"/>
+                  </a:lnTo>
+                  <a:lnTo>
+                    <a:pt x="7019007" y="2615776"/>
+                  </a:lnTo>
+                  <a:lnTo>
+                    <a:pt x="7090630" y="2619401"/>
                   </a:lnTo>
                 </a:path>
               </a:pathLst>
@@ -4001,309 +4001,309 @@
           </p:nvSpPr>
           <p:spPr>
             <a:xfrm>
-              <a:off x="1172049" y="4397861"/>
-              <a:ext cx="7090630" cy="736384"/>
+              <a:off x="1172049" y="4388529"/>
+              <a:ext cx="7090630" cy="747143"/>
             </a:xfrm>
             <a:custGeom>
               <a:avLst/>
               <a:pathLst>
-                <a:path w="7090630" h="736384">
+                <a:path w="7090630" h="747143">
                   <a:moveTo>
-                    <a:pt x="7090630" y="736384"/>
+                    <a:pt x="7090630" y="747143"/>
                   </a:moveTo>
                   <a:lnTo>
-                    <a:pt x="7019007" y="727517"/>
-                  </a:lnTo>
-                  <a:lnTo>
-                    <a:pt x="6947385" y="718465"/>
-                  </a:lnTo>
-                  <a:lnTo>
-                    <a:pt x="6875762" y="709222"/>
-                  </a:lnTo>
-                  <a:lnTo>
-                    <a:pt x="6804139" y="699786"/>
-                  </a:lnTo>
-                  <a:lnTo>
-                    <a:pt x="6732517" y="690152"/>
-                  </a:lnTo>
-                  <a:lnTo>
-                    <a:pt x="6660894" y="680316"/>
-                  </a:lnTo>
-                  <a:lnTo>
-                    <a:pt x="6589272" y="670274"/>
-                  </a:lnTo>
-                  <a:lnTo>
-                    <a:pt x="6517649" y="660021"/>
-                  </a:lnTo>
-                  <a:lnTo>
-                    <a:pt x="6446027" y="649554"/>
-                  </a:lnTo>
-                  <a:lnTo>
-                    <a:pt x="6374404" y="638867"/>
-                  </a:lnTo>
-                  <a:lnTo>
-                    <a:pt x="6302782" y="627956"/>
-                  </a:lnTo>
-                  <a:lnTo>
-                    <a:pt x="6231159" y="616817"/>
-                  </a:lnTo>
-                  <a:lnTo>
-                    <a:pt x="6159537" y="605443"/>
-                  </a:lnTo>
-                  <a:lnTo>
-                    <a:pt x="6087914" y="593832"/>
-                  </a:lnTo>
-                  <a:lnTo>
-                    <a:pt x="6016292" y="581977"/>
-                  </a:lnTo>
-                  <a:lnTo>
-                    <a:pt x="5944669" y="569874"/>
-                  </a:lnTo>
-                  <a:lnTo>
-                    <a:pt x="5873047" y="557516"/>
-                  </a:lnTo>
-                  <a:lnTo>
-                    <a:pt x="5801424" y="544900"/>
-                  </a:lnTo>
-                  <a:lnTo>
-                    <a:pt x="5729802" y="532020"/>
-                  </a:lnTo>
-                  <a:lnTo>
-                    <a:pt x="5658179" y="518869"/>
-                  </a:lnTo>
-                  <a:lnTo>
-                    <a:pt x="5586557" y="505443"/>
-                  </a:lnTo>
-                  <a:lnTo>
-                    <a:pt x="5514934" y="491735"/>
-                  </a:lnTo>
-                  <a:lnTo>
-                    <a:pt x="5443311" y="477740"/>
-                  </a:lnTo>
-                  <a:lnTo>
-                    <a:pt x="5371689" y="463452"/>
-                  </a:lnTo>
-                  <a:lnTo>
-                    <a:pt x="5300066" y="448864"/>
-                  </a:lnTo>
-                  <a:lnTo>
-                    <a:pt x="5228444" y="433970"/>
-                  </a:lnTo>
-                  <a:lnTo>
-                    <a:pt x="5156821" y="418764"/>
-                  </a:lnTo>
-                  <a:lnTo>
-                    <a:pt x="5085199" y="403240"/>
-                  </a:lnTo>
-                  <a:lnTo>
-                    <a:pt x="5013576" y="387390"/>
-                  </a:lnTo>
-                  <a:lnTo>
-                    <a:pt x="4941954" y="371207"/>
-                  </a:lnTo>
-                  <a:lnTo>
-                    <a:pt x="4870331" y="354686"/>
-                  </a:lnTo>
-                  <a:lnTo>
-                    <a:pt x="4798709" y="337818"/>
-                  </a:lnTo>
-                  <a:lnTo>
-                    <a:pt x="4727086" y="327671"/>
-                  </a:lnTo>
-                  <a:lnTo>
-                    <a:pt x="4655464" y="323475"/>
-                  </a:lnTo>
-                  <a:lnTo>
-                    <a:pt x="4583841" y="319257"/>
-                  </a:lnTo>
-                  <a:lnTo>
-                    <a:pt x="4512219" y="315018"/>
-                  </a:lnTo>
-                  <a:lnTo>
-                    <a:pt x="4440596" y="310758"/>
-                  </a:lnTo>
-                  <a:lnTo>
-                    <a:pt x="4368974" y="306477"/>
-                  </a:lnTo>
-                  <a:lnTo>
-                    <a:pt x="4297351" y="302173"/>
-                  </a:lnTo>
-                  <a:lnTo>
-                    <a:pt x="4225729" y="297848"/>
-                  </a:lnTo>
-                  <a:lnTo>
-                    <a:pt x="4154106" y="293502"/>
-                  </a:lnTo>
-                  <a:lnTo>
-                    <a:pt x="4082483" y="289133"/>
-                  </a:lnTo>
-                  <a:lnTo>
-                    <a:pt x="4010861" y="284742"/>
-                  </a:lnTo>
-                  <a:lnTo>
-                    <a:pt x="3939238" y="280329"/>
-                  </a:lnTo>
-                  <a:lnTo>
-                    <a:pt x="3867616" y="275894"/>
-                  </a:lnTo>
-                  <a:lnTo>
-                    <a:pt x="3795993" y="271437"/>
-                  </a:lnTo>
-                  <a:lnTo>
-                    <a:pt x="3724371" y="266957"/>
-                  </a:lnTo>
-                  <a:lnTo>
-                    <a:pt x="3652748" y="262454"/>
-                  </a:lnTo>
-                  <a:lnTo>
-                    <a:pt x="3581126" y="257929"/>
-                  </a:lnTo>
-                  <a:lnTo>
-                    <a:pt x="3509503" y="253381"/>
-                  </a:lnTo>
-                  <a:lnTo>
-                    <a:pt x="3437881" y="248809"/>
-                  </a:lnTo>
-                  <a:lnTo>
-                    <a:pt x="3366258" y="244215"/>
-                  </a:lnTo>
-                  <a:lnTo>
-                    <a:pt x="3294636" y="239598"/>
-                  </a:lnTo>
-                  <a:lnTo>
-                    <a:pt x="3223013" y="234957"/>
-                  </a:lnTo>
-                  <a:lnTo>
-                    <a:pt x="3151391" y="230293"/>
-                  </a:lnTo>
-                  <a:lnTo>
-                    <a:pt x="3079768" y="225606"/>
-                  </a:lnTo>
-                  <a:lnTo>
-                    <a:pt x="3008146" y="220894"/>
-                  </a:lnTo>
-                  <a:lnTo>
-                    <a:pt x="2936523" y="216159"/>
-                  </a:lnTo>
-                  <a:lnTo>
-                    <a:pt x="2864901" y="211400"/>
-                  </a:lnTo>
-                  <a:lnTo>
-                    <a:pt x="2793278" y="206617"/>
-                  </a:lnTo>
-                  <a:lnTo>
-                    <a:pt x="2721655" y="201810"/>
-                  </a:lnTo>
-                  <a:lnTo>
-                    <a:pt x="2650033" y="196979"/>
-                  </a:lnTo>
-                  <a:lnTo>
-                    <a:pt x="2578410" y="192123"/>
-                  </a:lnTo>
-                  <a:lnTo>
-                    <a:pt x="2506788" y="187243"/>
-                  </a:lnTo>
-                  <a:lnTo>
-                    <a:pt x="2435165" y="182338"/>
-                  </a:lnTo>
-                  <a:lnTo>
-                    <a:pt x="2363543" y="177409"/>
-                  </a:lnTo>
-                  <a:lnTo>
-                    <a:pt x="2291920" y="172454"/>
-                  </a:lnTo>
-                  <a:lnTo>
-                    <a:pt x="2220298" y="167475"/>
-                  </a:lnTo>
-                  <a:lnTo>
-                    <a:pt x="2148675" y="162470"/>
-                  </a:lnTo>
-                  <a:lnTo>
-                    <a:pt x="2077053" y="157441"/>
-                  </a:lnTo>
-                  <a:lnTo>
-                    <a:pt x="2005430" y="152385"/>
-                  </a:lnTo>
-                  <a:lnTo>
-                    <a:pt x="1933808" y="147305"/>
-                  </a:lnTo>
-                  <a:lnTo>
-                    <a:pt x="1862185" y="142198"/>
-                  </a:lnTo>
-                  <a:lnTo>
-                    <a:pt x="1790563" y="137066"/>
-                  </a:lnTo>
-                  <a:lnTo>
-                    <a:pt x="1718940" y="131908"/>
-                  </a:lnTo>
-                  <a:lnTo>
-                    <a:pt x="1647318" y="126724"/>
-                  </a:lnTo>
-                  <a:lnTo>
-                    <a:pt x="1575695" y="121514"/>
-                  </a:lnTo>
-                  <a:lnTo>
-                    <a:pt x="1504073" y="116278"/>
-                  </a:lnTo>
-                  <a:lnTo>
-                    <a:pt x="1432450" y="111015"/>
-                  </a:lnTo>
-                  <a:lnTo>
-                    <a:pt x="1360827" y="105726"/>
-                  </a:lnTo>
-                  <a:lnTo>
-                    <a:pt x="1289205" y="100409"/>
-                  </a:lnTo>
-                  <a:lnTo>
-                    <a:pt x="1217582" y="95067"/>
-                  </a:lnTo>
-                  <a:lnTo>
-                    <a:pt x="1145960" y="89697"/>
-                  </a:lnTo>
-                  <a:lnTo>
-                    <a:pt x="1074337" y="84300"/>
-                  </a:lnTo>
-                  <a:lnTo>
-                    <a:pt x="1002715" y="78876"/>
-                  </a:lnTo>
-                  <a:lnTo>
-                    <a:pt x="931092" y="73424"/>
-                  </a:lnTo>
-                  <a:lnTo>
-                    <a:pt x="859470" y="67945"/>
-                  </a:lnTo>
-                  <a:lnTo>
-                    <a:pt x="787847" y="62438"/>
-                  </a:lnTo>
-                  <a:lnTo>
-                    <a:pt x="716225" y="56904"/>
-                  </a:lnTo>
-                  <a:lnTo>
-                    <a:pt x="644602" y="51341"/>
-                  </a:lnTo>
-                  <a:lnTo>
-                    <a:pt x="572980" y="45751"/>
-                  </a:lnTo>
-                  <a:lnTo>
-                    <a:pt x="501357" y="40132"/>
-                  </a:lnTo>
-                  <a:lnTo>
-                    <a:pt x="429735" y="34485"/>
-                  </a:lnTo>
-                  <a:lnTo>
-                    <a:pt x="358112" y="28810"/>
-                  </a:lnTo>
-                  <a:lnTo>
-                    <a:pt x="286490" y="23105"/>
-                  </a:lnTo>
-                  <a:lnTo>
-                    <a:pt x="214867" y="17372"/>
-                  </a:lnTo>
-                  <a:lnTo>
-                    <a:pt x="143245" y="11611"/>
-                  </a:lnTo>
-                  <a:lnTo>
-                    <a:pt x="71622" y="5820"/>
+                    <a:pt x="7019007" y="738262"/>
+                  </a:lnTo>
+                  <a:lnTo>
+                    <a:pt x="6947385" y="729193"/>
+                  </a:lnTo>
+                  <a:lnTo>
+                    <a:pt x="6875762" y="719933"/>
+                  </a:lnTo>
+                  <a:lnTo>
+                    <a:pt x="6804139" y="710478"/>
+                  </a:lnTo>
+                  <a:lnTo>
+                    <a:pt x="6732517" y="700824"/>
+                  </a:lnTo>
+                  <a:lnTo>
+                    <a:pt x="6660894" y="690966"/>
+                  </a:lnTo>
+                  <a:lnTo>
+                    <a:pt x="6589272" y="680901"/>
+                  </a:lnTo>
+                  <a:lnTo>
+                    <a:pt x="6517649" y="670624"/>
+                  </a:lnTo>
+                  <a:lnTo>
+                    <a:pt x="6446027" y="660130"/>
+                  </a:lnTo>
+                  <a:lnTo>
+                    <a:pt x="6374404" y="649415"/>
+                  </a:lnTo>
+                  <a:lnTo>
+                    <a:pt x="6302782" y="638474"/>
+                  </a:lnTo>
+                  <a:lnTo>
+                    <a:pt x="6231159" y="627303"/>
+                  </a:lnTo>
+                  <a:lnTo>
+                    <a:pt x="6159537" y="615897"/>
+                  </a:lnTo>
+                  <a:lnTo>
+                    <a:pt x="6087914" y="604250"/>
+                  </a:lnTo>
+                  <a:lnTo>
+                    <a:pt x="6016292" y="592358"/>
+                  </a:lnTo>
+                  <a:lnTo>
+                    <a:pt x="5944669" y="580215"/>
+                  </a:lnTo>
+                  <a:lnTo>
+                    <a:pt x="5873047" y="567817"/>
+                  </a:lnTo>
+                  <a:lnTo>
+                    <a:pt x="5801424" y="555157"/>
+                  </a:lnTo>
+                  <a:lnTo>
+                    <a:pt x="5729802" y="542230"/>
+                  </a:lnTo>
+                  <a:lnTo>
+                    <a:pt x="5658179" y="529032"/>
+                  </a:lnTo>
+                  <a:lnTo>
+                    <a:pt x="5586557" y="515555"/>
+                  </a:lnTo>
+                  <a:lnTo>
+                    <a:pt x="5514934" y="501794"/>
+                  </a:lnTo>
+                  <a:lnTo>
+                    <a:pt x="5443311" y="487743"/>
+                  </a:lnTo>
+                  <a:lnTo>
+                    <a:pt x="5371689" y="473397"/>
+                  </a:lnTo>
+                  <a:lnTo>
+                    <a:pt x="5300066" y="458748"/>
+                  </a:lnTo>
+                  <a:lnTo>
+                    <a:pt x="5228444" y="443790"/>
+                  </a:lnTo>
+                  <a:lnTo>
+                    <a:pt x="5156821" y="428517"/>
+                  </a:lnTo>
+                  <a:lnTo>
+                    <a:pt x="5085199" y="412923"/>
+                  </a:lnTo>
+                  <a:lnTo>
+                    <a:pt x="5013576" y="397000"/>
+                  </a:lnTo>
+                  <a:lnTo>
+                    <a:pt x="4941954" y="380741"/>
+                  </a:lnTo>
+                  <a:lnTo>
+                    <a:pt x="4870331" y="364140"/>
+                  </a:lnTo>
+                  <a:lnTo>
+                    <a:pt x="4798709" y="347190"/>
+                  </a:lnTo>
+                  <a:lnTo>
+                    <a:pt x="4727086" y="336949"/>
+                  </a:lnTo>
+                  <a:lnTo>
+                    <a:pt x="4655464" y="332652"/>
+                  </a:lnTo>
+                  <a:lnTo>
+                    <a:pt x="4583841" y="328332"/>
+                  </a:lnTo>
+                  <a:lnTo>
+                    <a:pt x="4512219" y="323990"/>
+                  </a:lnTo>
+                  <a:lnTo>
+                    <a:pt x="4440596" y="319626"/>
+                  </a:lnTo>
+                  <a:lnTo>
+                    <a:pt x="4368974" y="315239"/>
+                  </a:lnTo>
+                  <a:lnTo>
+                    <a:pt x="4297351" y="310830"/>
+                  </a:lnTo>
+                  <a:lnTo>
+                    <a:pt x="4225729" y="306398"/>
+                  </a:lnTo>
+                  <a:lnTo>
+                    <a:pt x="4154106" y="301942"/>
+                  </a:lnTo>
+                  <a:lnTo>
+                    <a:pt x="4082483" y="297464"/>
+                  </a:lnTo>
+                  <a:lnTo>
+                    <a:pt x="4010861" y="292963"/>
+                  </a:lnTo>
+                  <a:lnTo>
+                    <a:pt x="3939238" y="288438"/>
+                  </a:lnTo>
+                  <a:lnTo>
+                    <a:pt x="3867616" y="283890"/>
+                  </a:lnTo>
+                  <a:lnTo>
+                    <a:pt x="3795993" y="279319"/>
+                  </a:lnTo>
+                  <a:lnTo>
+                    <a:pt x="3724371" y="274724"/>
+                  </a:lnTo>
+                  <a:lnTo>
+                    <a:pt x="3652748" y="270105"/>
+                  </a:lnTo>
+                  <a:lnTo>
+                    <a:pt x="3581126" y="265463"/>
+                  </a:lnTo>
+                  <a:lnTo>
+                    <a:pt x="3509503" y="260796"/>
+                  </a:lnTo>
+                  <a:lnTo>
+                    <a:pt x="3437881" y="256105"/>
+                  </a:lnTo>
+                  <a:lnTo>
+                    <a:pt x="3366258" y="251390"/>
+                  </a:lnTo>
+                  <a:lnTo>
+                    <a:pt x="3294636" y="246651"/>
+                  </a:lnTo>
+                  <a:lnTo>
+                    <a:pt x="3223013" y="241887"/>
+                  </a:lnTo>
+                  <a:lnTo>
+                    <a:pt x="3151391" y="237099"/>
+                  </a:lnTo>
+                  <a:lnTo>
+                    <a:pt x="3079768" y="232285"/>
+                  </a:lnTo>
+                  <a:lnTo>
+                    <a:pt x="3008146" y="227447"/>
+                  </a:lnTo>
+                  <a:lnTo>
+                    <a:pt x="2936523" y="222584"/>
+                  </a:lnTo>
+                  <a:lnTo>
+                    <a:pt x="2864901" y="217696"/>
+                  </a:lnTo>
+                  <a:lnTo>
+                    <a:pt x="2793278" y="212783"/>
+                  </a:lnTo>
+                  <a:lnTo>
+                    <a:pt x="2721655" y="207844"/>
+                  </a:lnTo>
+                  <a:lnTo>
+                    <a:pt x="2650033" y="202880"/>
+                  </a:lnTo>
+                  <a:lnTo>
+                    <a:pt x="2578410" y="197890"/>
+                  </a:lnTo>
+                  <a:lnTo>
+                    <a:pt x="2506788" y="192874"/>
+                  </a:lnTo>
+                  <a:lnTo>
+                    <a:pt x="2435165" y="187832"/>
+                  </a:lnTo>
+                  <a:lnTo>
+                    <a:pt x="2363543" y="182765"/>
+                  </a:lnTo>
+                  <a:lnTo>
+                    <a:pt x="2291920" y="177671"/>
+                  </a:lnTo>
+                  <a:lnTo>
+                    <a:pt x="2220298" y="172551"/>
+                  </a:lnTo>
+                  <a:lnTo>
+                    <a:pt x="2148675" y="167404"/>
+                  </a:lnTo>
+                  <a:lnTo>
+                    <a:pt x="2077053" y="162231"/>
+                  </a:lnTo>
+                  <a:lnTo>
+                    <a:pt x="2005430" y="157031"/>
+                  </a:lnTo>
+                  <a:lnTo>
+                    <a:pt x="1933808" y="151804"/>
+                  </a:lnTo>
+                  <a:lnTo>
+                    <a:pt x="1862185" y="146550"/>
+                  </a:lnTo>
+                  <a:lnTo>
+                    <a:pt x="1790563" y="141269"/>
+                  </a:lnTo>
+                  <a:lnTo>
+                    <a:pt x="1718940" y="135961"/>
+                  </a:lnTo>
+                  <a:lnTo>
+                    <a:pt x="1647318" y="130625"/>
+                  </a:lnTo>
+                  <a:lnTo>
+                    <a:pt x="1575695" y="125262"/>
+                  </a:lnTo>
+                  <a:lnTo>
+                    <a:pt x="1504073" y="119871"/>
+                  </a:lnTo>
+                  <a:lnTo>
+                    <a:pt x="1432450" y="114452"/>
+                  </a:lnTo>
+                  <a:lnTo>
+                    <a:pt x="1360827" y="109005"/>
+                  </a:lnTo>
+                  <a:lnTo>
+                    <a:pt x="1289205" y="103530"/>
+                  </a:lnTo>
+                  <a:lnTo>
+                    <a:pt x="1217582" y="98027"/>
+                  </a:lnTo>
+                  <a:lnTo>
+                    <a:pt x="1145960" y="92495"/>
+                  </a:lnTo>
+                  <a:lnTo>
+                    <a:pt x="1074337" y="86935"/>
+                  </a:lnTo>
+                  <a:lnTo>
+                    <a:pt x="1002715" y="81346"/>
+                  </a:lnTo>
+                  <a:lnTo>
+                    <a:pt x="931092" y="75728"/>
+                  </a:lnTo>
+                  <a:lnTo>
+                    <a:pt x="859470" y="70081"/>
+                  </a:lnTo>
+                  <a:lnTo>
+                    <a:pt x="787847" y="64405"/>
+                  </a:lnTo>
+                  <a:lnTo>
+                    <a:pt x="716225" y="58700"/>
+                  </a:lnTo>
+                  <a:lnTo>
+                    <a:pt x="644602" y="52965"/>
+                  </a:lnTo>
+                  <a:lnTo>
+                    <a:pt x="572980" y="47201"/>
+                  </a:lnTo>
+                  <a:lnTo>
+                    <a:pt x="501357" y="41406"/>
+                  </a:lnTo>
+                  <a:lnTo>
+                    <a:pt x="429735" y="35582"/>
+                  </a:lnTo>
+                  <a:lnTo>
+                    <a:pt x="358112" y="29728"/>
+                  </a:lnTo>
+                  <a:lnTo>
+                    <a:pt x="286490" y="23843"/>
+                  </a:lnTo>
+                  <a:lnTo>
+                    <a:pt x="214867" y="17928"/>
+                  </a:lnTo>
+                  <a:lnTo>
+                    <a:pt x="143245" y="11983"/>
+                  </a:lnTo>
+                  <a:lnTo>
+                    <a:pt x="71622" y="6007"/>
                   </a:lnTo>
                   <a:lnTo>
                     <a:pt x="0" y="0"/>
@@ -4326,312 +4326,312 @@
           </p:nvSpPr>
           <p:spPr>
             <a:xfrm>
-              <a:off x="1172049" y="3601781"/>
-              <a:ext cx="7090630" cy="1409589"/>
+              <a:off x="1172049" y="3587113"/>
+              <a:ext cx="7090630" cy="1426243"/>
             </a:xfrm>
             <a:custGeom>
               <a:avLst/>
               <a:pathLst>
-                <a:path w="7090630" h="1409589">
+                <a:path w="7090630" h="1426243">
                   <a:moveTo>
                     <a:pt x="0" y="0"/>
                   </a:moveTo>
                   <a:lnTo>
-                    <a:pt x="71622" y="25041"/>
-                  </a:lnTo>
-                  <a:lnTo>
-                    <a:pt x="143245" y="49762"/>
-                  </a:lnTo>
-                  <a:lnTo>
-                    <a:pt x="214867" y="74167"/>
-                  </a:lnTo>
-                  <a:lnTo>
-                    <a:pt x="286490" y="98259"/>
-                  </a:lnTo>
-                  <a:lnTo>
-                    <a:pt x="358112" y="122043"/>
-                  </a:lnTo>
-                  <a:lnTo>
-                    <a:pt x="429735" y="145522"/>
-                  </a:lnTo>
-                  <a:lnTo>
-                    <a:pt x="501357" y="168700"/>
-                  </a:lnTo>
-                  <a:lnTo>
-                    <a:pt x="572980" y="191581"/>
-                  </a:lnTo>
-                  <a:lnTo>
-                    <a:pt x="644602" y="214170"/>
-                  </a:lnTo>
-                  <a:lnTo>
-                    <a:pt x="716225" y="236469"/>
-                  </a:lnTo>
-                  <a:lnTo>
-                    <a:pt x="787847" y="258483"/>
-                  </a:lnTo>
-                  <a:lnTo>
-                    <a:pt x="859470" y="280214"/>
-                  </a:lnTo>
-                  <a:lnTo>
-                    <a:pt x="931092" y="301668"/>
-                  </a:lnTo>
-                  <a:lnTo>
-                    <a:pt x="1002715" y="322846"/>
-                  </a:lnTo>
-                  <a:lnTo>
-                    <a:pt x="1074337" y="343754"/>
-                  </a:lnTo>
-                  <a:lnTo>
-                    <a:pt x="1145960" y="364393"/>
-                  </a:lnTo>
-                  <a:lnTo>
-                    <a:pt x="1217582" y="384769"/>
-                  </a:lnTo>
-                  <a:lnTo>
-                    <a:pt x="1289205" y="404883"/>
-                  </a:lnTo>
-                  <a:lnTo>
-                    <a:pt x="1360827" y="424740"/>
-                  </a:lnTo>
-                  <a:lnTo>
-                    <a:pt x="1432450" y="444343"/>
-                  </a:lnTo>
-                  <a:lnTo>
-                    <a:pt x="1504073" y="463694"/>
-                  </a:lnTo>
-                  <a:lnTo>
-                    <a:pt x="1575695" y="482798"/>
-                  </a:lnTo>
-                  <a:lnTo>
-                    <a:pt x="1647318" y="501657"/>
-                  </a:lnTo>
-                  <a:lnTo>
-                    <a:pt x="1718940" y="520275"/>
-                  </a:lnTo>
-                  <a:lnTo>
-                    <a:pt x="1790563" y="538654"/>
-                  </a:lnTo>
-                  <a:lnTo>
-                    <a:pt x="1862185" y="556798"/>
-                  </a:lnTo>
-                  <a:lnTo>
-                    <a:pt x="1933808" y="574709"/>
-                  </a:lnTo>
-                  <a:lnTo>
-                    <a:pt x="2005430" y="592391"/>
-                  </a:lnTo>
-                  <a:lnTo>
-                    <a:pt x="2077053" y="609847"/>
-                  </a:lnTo>
-                  <a:lnTo>
-                    <a:pt x="2148675" y="627079"/>
-                  </a:lnTo>
-                  <a:lnTo>
-                    <a:pt x="2220298" y="644090"/>
-                  </a:lnTo>
-                  <a:lnTo>
-                    <a:pt x="2291920" y="660884"/>
-                  </a:lnTo>
-                  <a:lnTo>
-                    <a:pt x="2363543" y="677462"/>
-                  </a:lnTo>
-                  <a:lnTo>
-                    <a:pt x="2435165" y="693829"/>
-                  </a:lnTo>
-                  <a:lnTo>
-                    <a:pt x="2506788" y="709985"/>
-                  </a:lnTo>
-                  <a:lnTo>
-                    <a:pt x="2578410" y="725935"/>
-                  </a:lnTo>
-                  <a:lnTo>
-                    <a:pt x="2650033" y="741680"/>
-                  </a:lnTo>
-                  <a:lnTo>
-                    <a:pt x="2721655" y="757224"/>
-                  </a:lnTo>
-                  <a:lnTo>
-                    <a:pt x="2793278" y="772569"/>
-                  </a:lnTo>
-                  <a:lnTo>
-                    <a:pt x="2864901" y="787717"/>
-                  </a:lnTo>
-                  <a:lnTo>
-                    <a:pt x="2936523" y="802672"/>
-                  </a:lnTo>
-                  <a:lnTo>
-                    <a:pt x="3008146" y="817434"/>
-                  </a:lnTo>
-                  <a:lnTo>
-                    <a:pt x="3079768" y="832008"/>
-                  </a:lnTo>
-                  <a:lnTo>
-                    <a:pt x="3151391" y="846395"/>
-                  </a:lnTo>
-                  <a:lnTo>
-                    <a:pt x="3223013" y="860598"/>
-                  </a:lnTo>
-                  <a:lnTo>
-                    <a:pt x="3294636" y="874619"/>
-                  </a:lnTo>
-                  <a:lnTo>
-                    <a:pt x="3366258" y="888460"/>
-                  </a:lnTo>
-                  <a:lnTo>
-                    <a:pt x="3437881" y="902125"/>
-                  </a:lnTo>
-                  <a:lnTo>
-                    <a:pt x="3509503" y="915614"/>
-                  </a:lnTo>
-                  <a:lnTo>
-                    <a:pt x="3581126" y="928930"/>
-                  </a:lnTo>
-                  <a:lnTo>
-                    <a:pt x="3652748" y="942076"/>
-                  </a:lnTo>
-                  <a:lnTo>
-                    <a:pt x="3724371" y="955054"/>
-                  </a:lnTo>
-                  <a:lnTo>
-                    <a:pt x="3795993" y="967865"/>
-                  </a:lnTo>
-                  <a:lnTo>
-                    <a:pt x="3867616" y="980512"/>
-                  </a:lnTo>
-                  <a:lnTo>
-                    <a:pt x="3939238" y="992998"/>
-                  </a:lnTo>
-                  <a:lnTo>
-                    <a:pt x="4010861" y="1005323"/>
-                  </a:lnTo>
-                  <a:lnTo>
-                    <a:pt x="4082483" y="1017491"/>
-                  </a:lnTo>
-                  <a:lnTo>
-                    <a:pt x="4154106" y="1029502"/>
-                  </a:lnTo>
-                  <a:lnTo>
-                    <a:pt x="4225729" y="1041360"/>
-                  </a:lnTo>
-                  <a:lnTo>
-                    <a:pt x="4297351" y="1053067"/>
-                  </a:lnTo>
-                  <a:lnTo>
-                    <a:pt x="4368974" y="1064623"/>
-                  </a:lnTo>
-                  <a:lnTo>
-                    <a:pt x="4440596" y="1076031"/>
-                  </a:lnTo>
-                  <a:lnTo>
-                    <a:pt x="4512219" y="1087293"/>
-                  </a:lnTo>
-                  <a:lnTo>
-                    <a:pt x="4583841" y="1098411"/>
-                  </a:lnTo>
-                  <a:lnTo>
-                    <a:pt x="4655464" y="1109387"/>
-                  </a:lnTo>
-                  <a:lnTo>
-                    <a:pt x="4727086" y="1120221"/>
-                  </a:lnTo>
-                  <a:lnTo>
-                    <a:pt x="4798709" y="1130918"/>
-                  </a:lnTo>
-                  <a:lnTo>
-                    <a:pt x="4870331" y="1141477"/>
-                  </a:lnTo>
-                  <a:lnTo>
-                    <a:pt x="4941954" y="1151901"/>
-                  </a:lnTo>
-                  <a:lnTo>
-                    <a:pt x="5013576" y="1162191"/>
-                  </a:lnTo>
-                  <a:lnTo>
-                    <a:pt x="5085199" y="1172350"/>
-                  </a:lnTo>
-                  <a:lnTo>
-                    <a:pt x="5156821" y="1182379"/>
-                  </a:lnTo>
-                  <a:lnTo>
-                    <a:pt x="5228444" y="1192279"/>
-                  </a:lnTo>
-                  <a:lnTo>
-                    <a:pt x="5300066" y="1202053"/>
-                  </a:lnTo>
-                  <a:lnTo>
-                    <a:pt x="5371689" y="1211701"/>
-                  </a:lnTo>
-                  <a:lnTo>
-                    <a:pt x="5443311" y="1221226"/>
-                  </a:lnTo>
-                  <a:lnTo>
-                    <a:pt x="5514934" y="1230628"/>
-                  </a:lnTo>
-                  <a:lnTo>
-                    <a:pt x="5586557" y="1239911"/>
-                  </a:lnTo>
-                  <a:lnTo>
-                    <a:pt x="5658179" y="1249074"/>
-                  </a:lnTo>
-                  <a:lnTo>
-                    <a:pt x="5729802" y="1258120"/>
-                  </a:lnTo>
-                  <a:lnTo>
-                    <a:pt x="5801424" y="1267050"/>
-                  </a:lnTo>
-                  <a:lnTo>
-                    <a:pt x="5873047" y="1275866"/>
-                  </a:lnTo>
-                  <a:lnTo>
-                    <a:pt x="5944669" y="1284569"/>
-                  </a:lnTo>
-                  <a:lnTo>
-                    <a:pt x="6016292" y="1293161"/>
-                  </a:lnTo>
-                  <a:lnTo>
-                    <a:pt x="6087914" y="1301642"/>
-                  </a:lnTo>
-                  <a:lnTo>
-                    <a:pt x="6159537" y="1310015"/>
-                  </a:lnTo>
-                  <a:lnTo>
-                    <a:pt x="6231159" y="1318281"/>
-                  </a:lnTo>
-                  <a:lnTo>
-                    <a:pt x="6302782" y="1326441"/>
-                  </a:lnTo>
-                  <a:lnTo>
-                    <a:pt x="6374404" y="1334496"/>
-                  </a:lnTo>
-                  <a:lnTo>
-                    <a:pt x="6446027" y="1342449"/>
-                  </a:lnTo>
-                  <a:lnTo>
-                    <a:pt x="6517649" y="1350299"/>
-                  </a:lnTo>
-                  <a:lnTo>
-                    <a:pt x="6589272" y="1358049"/>
-                  </a:lnTo>
-                  <a:lnTo>
-                    <a:pt x="6660894" y="1365699"/>
-                  </a:lnTo>
-                  <a:lnTo>
-                    <a:pt x="6732517" y="1373252"/>
-                  </a:lnTo>
-                  <a:lnTo>
-                    <a:pt x="6804139" y="1380708"/>
-                  </a:lnTo>
-                  <a:lnTo>
-                    <a:pt x="6875762" y="1388068"/>
-                  </a:lnTo>
-                  <a:lnTo>
-                    <a:pt x="6947385" y="1395334"/>
-                  </a:lnTo>
-                  <a:lnTo>
-                    <a:pt x="7019007" y="1402507"/>
-                  </a:lnTo>
-                  <a:lnTo>
-                    <a:pt x="7090630" y="1409589"/>
+                    <a:pt x="71622" y="25448"/>
+                  </a:lnTo>
+                  <a:lnTo>
+                    <a:pt x="143245" y="50567"/>
+                  </a:lnTo>
+                  <a:lnTo>
+                    <a:pt x="214867" y="75362"/>
+                  </a:lnTo>
+                  <a:lnTo>
+                    <a:pt x="286490" y="99837"/>
+                  </a:lnTo>
+                  <a:lnTo>
+                    <a:pt x="358112" y="123995"/>
+                  </a:lnTo>
+                  <a:lnTo>
+                    <a:pt x="429735" y="147842"/>
+                  </a:lnTo>
+                  <a:lnTo>
+                    <a:pt x="501357" y="171380"/>
+                  </a:lnTo>
+                  <a:lnTo>
+                    <a:pt x="572980" y="194614"/>
+                  </a:lnTo>
+                  <a:lnTo>
+                    <a:pt x="644602" y="217549"/>
+                  </a:lnTo>
+                  <a:lnTo>
+                    <a:pt x="716225" y="240187"/>
+                  </a:lnTo>
+                  <a:lnTo>
+                    <a:pt x="787847" y="262532"/>
+                  </a:lnTo>
+                  <a:lnTo>
+                    <a:pt x="859470" y="284589"/>
+                  </a:lnTo>
+                  <a:lnTo>
+                    <a:pt x="931092" y="306361"/>
+                  </a:lnTo>
+                  <a:lnTo>
+                    <a:pt x="1002715" y="327852"/>
+                  </a:lnTo>
+                  <a:lnTo>
+                    <a:pt x="1074337" y="349065"/>
+                  </a:lnTo>
+                  <a:lnTo>
+                    <a:pt x="1145960" y="370005"/>
+                  </a:lnTo>
+                  <a:lnTo>
+                    <a:pt x="1217582" y="390673"/>
+                  </a:lnTo>
+                  <a:lnTo>
+                    <a:pt x="1289205" y="411075"/>
+                  </a:lnTo>
+                  <a:lnTo>
+                    <a:pt x="1360827" y="431213"/>
+                  </a:lnTo>
+                  <a:lnTo>
+                    <a:pt x="1432450" y="451092"/>
+                  </a:lnTo>
+                  <a:lnTo>
+                    <a:pt x="1504073" y="470713"/>
+                  </a:lnTo>
+                  <a:lnTo>
+                    <a:pt x="1575695" y="490081"/>
+                  </a:lnTo>
+                  <a:lnTo>
+                    <a:pt x="1647318" y="509199"/>
+                  </a:lnTo>
+                  <a:lnTo>
+                    <a:pt x="1718940" y="528069"/>
+                  </a:lnTo>
+                  <a:lnTo>
+                    <a:pt x="1790563" y="546696"/>
+                  </a:lnTo>
+                  <a:lnTo>
+                    <a:pt x="1862185" y="565083"/>
+                  </a:lnTo>
+                  <a:lnTo>
+                    <a:pt x="1933808" y="583232"/>
+                  </a:lnTo>
+                  <a:lnTo>
+                    <a:pt x="2005430" y="601146"/>
+                  </a:lnTo>
+                  <a:lnTo>
+                    <a:pt x="2077053" y="618830"/>
+                  </a:lnTo>
+                  <a:lnTo>
+                    <a:pt x="2148675" y="636284"/>
+                  </a:lnTo>
+                  <a:lnTo>
+                    <a:pt x="2220298" y="653514"/>
+                  </a:lnTo>
+                  <a:lnTo>
+                    <a:pt x="2291920" y="670520"/>
+                  </a:lnTo>
+                  <a:lnTo>
+                    <a:pt x="2363543" y="687307"/>
+                  </a:lnTo>
+                  <a:lnTo>
+                    <a:pt x="2435165" y="703877"/>
+                  </a:lnTo>
+                  <a:lnTo>
+                    <a:pt x="2506788" y="720234"/>
+                  </a:lnTo>
+                  <a:lnTo>
+                    <a:pt x="2578410" y="736378"/>
+                  </a:lnTo>
+                  <a:lnTo>
+                    <a:pt x="2650033" y="752315"/>
+                  </a:lnTo>
+                  <a:lnTo>
+                    <a:pt x="2721655" y="768045"/>
+                  </a:lnTo>
+                  <a:lnTo>
+                    <a:pt x="2793278" y="783573"/>
+                  </a:lnTo>
+                  <a:lnTo>
+                    <a:pt x="2864901" y="798899"/>
+                  </a:lnTo>
+                  <a:lnTo>
+                    <a:pt x="2936523" y="814028"/>
+                  </a:lnTo>
+                  <a:lnTo>
+                    <a:pt x="3008146" y="828961"/>
+                  </a:lnTo>
+                  <a:lnTo>
+                    <a:pt x="3079768" y="843702"/>
+                  </a:lnTo>
+                  <a:lnTo>
+                    <a:pt x="3151391" y="858252"/>
+                  </a:lnTo>
+                  <a:lnTo>
+                    <a:pt x="3223013" y="872614"/>
+                  </a:lnTo>
+                  <a:lnTo>
+                    <a:pt x="3294636" y="886791"/>
+                  </a:lnTo>
+                  <a:lnTo>
+                    <a:pt x="3366258" y="900784"/>
+                  </a:lnTo>
+                  <a:lnTo>
+                    <a:pt x="3437881" y="914597"/>
+                  </a:lnTo>
+                  <a:lnTo>
+                    <a:pt x="3509503" y="928231"/>
+                  </a:lnTo>
+                  <a:lnTo>
+                    <a:pt x="3581126" y="941689"/>
+                  </a:lnTo>
+                  <a:lnTo>
+                    <a:pt x="3652748" y="954974"/>
+                  </a:lnTo>
+                  <a:lnTo>
+                    <a:pt x="3724371" y="968087"/>
+                  </a:lnTo>
+                  <a:lnTo>
+                    <a:pt x="3795993" y="981030"/>
+                  </a:lnTo>
+                  <a:lnTo>
+                    <a:pt x="3867616" y="993806"/>
+                  </a:lnTo>
+                  <a:lnTo>
+                    <a:pt x="3939238" y="1006417"/>
+                  </a:lnTo>
+                  <a:lnTo>
+                    <a:pt x="4010861" y="1018866"/>
+                  </a:lnTo>
+                  <a:lnTo>
+                    <a:pt x="4082483" y="1031153"/>
+                  </a:lnTo>
+                  <a:lnTo>
+                    <a:pt x="4154106" y="1043282"/>
+                  </a:lnTo>
+                  <a:lnTo>
+                    <a:pt x="4225729" y="1055254"/>
+                  </a:lnTo>
+                  <a:lnTo>
+                    <a:pt x="4297351" y="1067071"/>
+                  </a:lnTo>
+                  <a:lnTo>
+                    <a:pt x="4368974" y="1078736"/>
+                  </a:lnTo>
+                  <a:lnTo>
+                    <a:pt x="4440596" y="1090250"/>
+                  </a:lnTo>
+                  <a:lnTo>
+                    <a:pt x="4512219" y="1101616"/>
+                  </a:lnTo>
+                  <a:lnTo>
+                    <a:pt x="4583841" y="1112834"/>
+                  </a:lnTo>
+                  <a:lnTo>
+                    <a:pt x="4655464" y="1123908"/>
+                  </a:lnTo>
+                  <a:lnTo>
+                    <a:pt x="4727086" y="1134839"/>
+                  </a:lnTo>
+                  <a:lnTo>
+                    <a:pt x="4798709" y="1145628"/>
+                  </a:lnTo>
+                  <a:lnTo>
+                    <a:pt x="4870331" y="1156278"/>
+                  </a:lnTo>
+                  <a:lnTo>
+                    <a:pt x="4941954" y="1166791"/>
+                  </a:lnTo>
+                  <a:lnTo>
+                    <a:pt x="5013576" y="1177168"/>
+                  </a:lnTo>
+                  <a:lnTo>
+                    <a:pt x="5085199" y="1187410"/>
+                  </a:lnTo>
+                  <a:lnTo>
+                    <a:pt x="5156821" y="1197521"/>
+                  </a:lnTo>
+                  <a:lnTo>
+                    <a:pt x="5228444" y="1207500"/>
+                  </a:lnTo>
+                  <a:lnTo>
+                    <a:pt x="5300066" y="1217351"/>
+                  </a:lnTo>
+                  <a:lnTo>
+                    <a:pt x="5371689" y="1227075"/>
+                  </a:lnTo>
+                  <a:lnTo>
+                    <a:pt x="5443311" y="1236673"/>
+                  </a:lnTo>
+                  <a:lnTo>
+                    <a:pt x="5514934" y="1246147"/>
+                  </a:lnTo>
+                  <a:lnTo>
+                    <a:pt x="5586557" y="1255499"/>
+                  </a:lnTo>
+                  <a:lnTo>
+                    <a:pt x="5658179" y="1264730"/>
+                  </a:lnTo>
+                  <a:lnTo>
+                    <a:pt x="5729802" y="1273841"/>
+                  </a:lnTo>
+                  <a:lnTo>
+                    <a:pt x="5801424" y="1282835"/>
+                  </a:lnTo>
+                  <a:lnTo>
+                    <a:pt x="5873047" y="1291713"/>
+                  </a:lnTo>
+                  <a:lnTo>
+                    <a:pt x="5944669" y="1300476"/>
+                  </a:lnTo>
+                  <a:lnTo>
+                    <a:pt x="6016292" y="1309126"/>
+                  </a:lnTo>
+                  <a:lnTo>
+                    <a:pt x="6087914" y="1317664"/>
+                  </a:lnTo>
+                  <a:lnTo>
+                    <a:pt x="6159537" y="1326092"/>
+                  </a:lnTo>
+                  <a:lnTo>
+                    <a:pt x="6231159" y="1334411"/>
+                  </a:lnTo>
+                  <a:lnTo>
+                    <a:pt x="6302782" y="1342623"/>
+                  </a:lnTo>
+                  <a:lnTo>
+                    <a:pt x="6374404" y="1350729"/>
+                  </a:lnTo>
+                  <a:lnTo>
+                    <a:pt x="6446027" y="1358729"/>
+                  </a:lnTo>
+                  <a:lnTo>
+                    <a:pt x="6517649" y="1366627"/>
+                  </a:lnTo>
+                  <a:lnTo>
+                    <a:pt x="6589272" y="1374422"/>
+                  </a:lnTo>
+                  <a:lnTo>
+                    <a:pt x="6660894" y="1382117"/>
+                  </a:lnTo>
+                  <a:lnTo>
+                    <a:pt x="6732517" y="1389713"/>
+                  </a:lnTo>
+                  <a:lnTo>
+                    <a:pt x="6804139" y="1397210"/>
+                  </a:lnTo>
+                  <a:lnTo>
+                    <a:pt x="6875762" y="1404610"/>
+                  </a:lnTo>
+                  <a:lnTo>
+                    <a:pt x="6947385" y="1411915"/>
+                  </a:lnTo>
+                  <a:lnTo>
+                    <a:pt x="7019007" y="1419126"/>
+                  </a:lnTo>
+                  <a:lnTo>
+                    <a:pt x="7090630" y="1426243"/>
                   </a:lnTo>
                 </a:path>
               </a:pathLst>
@@ -5371,7 +5371,7 @@
                   <a:latin typeface="Helvetica"/>
                   <a:cs typeface="Helvetica"/>
                 </a:rPr>
-                <a:t>subHR per 10 mL/min decline: 1.17 (1.06-1.29), p_Bonf = 0.008 (n = 6)  |  per IQR decline (Δ = 23.3): 1.44 (1.15-1.80)  |  IQR: [-12.8, 10.5]</a:t>
+                <a:t>subHR per 10 mL/min decline: 1.17 (1.06-1.29), p_Bonf = 0.007 (n = 6)  |  per IQR decline (Δ = 23.3): 1.44 (1.16-1.80)  |  IQR: [-12.8, 10.5]</a:t>
               </a:r>
             </a:p>
           </p:txBody>
